--- a/PaperFigures/Figure1/Learning_Protocol_Schematic.pptx
+++ b/PaperFigures/Figure1/Learning_Protocol_Schematic.pptx
@@ -1178,7 +1178,7 @@
           <a:p>
             <a:fld id="{AA57E6A9-8A90-E844-B49F-8A8E9126DDB3}" type="datetimeFigureOut">
               <a:rPr lang="en-US" smtClean="0"/>
-              <a:t>2/3/2025</a:t>
+              <a:t>5/21/2025</a:t>
             </a:fld>
             <a:endParaRPr lang="en-US"/>
           </a:p>
@@ -1348,7 +1348,7 @@
           <a:p>
             <a:fld id="{AA57E6A9-8A90-E844-B49F-8A8E9126DDB3}" type="datetimeFigureOut">
               <a:rPr lang="en-US" smtClean="0"/>
-              <a:t>2/3/2025</a:t>
+              <a:t>5/21/2025</a:t>
             </a:fld>
             <a:endParaRPr lang="en-US"/>
           </a:p>
@@ -1528,7 +1528,7 @@
           <a:p>
             <a:fld id="{AA57E6A9-8A90-E844-B49F-8A8E9126DDB3}" type="datetimeFigureOut">
               <a:rPr lang="en-US" smtClean="0"/>
-              <a:t>2/3/2025</a:t>
+              <a:t>5/21/2025</a:t>
             </a:fld>
             <a:endParaRPr lang="en-US"/>
           </a:p>
@@ -1698,7 +1698,7 @@
           <a:p>
             <a:fld id="{AA57E6A9-8A90-E844-B49F-8A8E9126DDB3}" type="datetimeFigureOut">
               <a:rPr lang="en-US" smtClean="0"/>
-              <a:t>2/3/2025</a:t>
+              <a:t>5/21/2025</a:t>
             </a:fld>
             <a:endParaRPr lang="en-US"/>
           </a:p>
@@ -1944,7 +1944,7 @@
           <a:p>
             <a:fld id="{AA57E6A9-8A90-E844-B49F-8A8E9126DDB3}" type="datetimeFigureOut">
               <a:rPr lang="en-US" smtClean="0"/>
-              <a:t>2/3/2025</a:t>
+              <a:t>5/21/2025</a:t>
             </a:fld>
             <a:endParaRPr lang="en-US"/>
           </a:p>
@@ -2176,7 +2176,7 @@
           <a:p>
             <a:fld id="{AA57E6A9-8A90-E844-B49F-8A8E9126DDB3}" type="datetimeFigureOut">
               <a:rPr lang="en-US" smtClean="0"/>
-              <a:t>2/3/2025</a:t>
+              <a:t>5/21/2025</a:t>
             </a:fld>
             <a:endParaRPr lang="en-US"/>
           </a:p>
@@ -2543,7 +2543,7 @@
           <a:p>
             <a:fld id="{AA57E6A9-8A90-E844-B49F-8A8E9126DDB3}" type="datetimeFigureOut">
               <a:rPr lang="en-US" smtClean="0"/>
-              <a:t>2/3/2025</a:t>
+              <a:t>5/21/2025</a:t>
             </a:fld>
             <a:endParaRPr lang="en-US"/>
           </a:p>
@@ -2661,7 +2661,7 @@
           <a:p>
             <a:fld id="{AA57E6A9-8A90-E844-B49F-8A8E9126DDB3}" type="datetimeFigureOut">
               <a:rPr lang="en-US" smtClean="0"/>
-              <a:t>2/3/2025</a:t>
+              <a:t>5/21/2025</a:t>
             </a:fld>
             <a:endParaRPr lang="en-US"/>
           </a:p>
@@ -2756,7 +2756,7 @@
           <a:p>
             <a:fld id="{AA57E6A9-8A90-E844-B49F-8A8E9126DDB3}" type="datetimeFigureOut">
               <a:rPr lang="en-US" smtClean="0"/>
-              <a:t>2/3/2025</a:t>
+              <a:t>5/21/2025</a:t>
             </a:fld>
             <a:endParaRPr lang="en-US"/>
           </a:p>
@@ -3033,7 +3033,7 @@
           <a:p>
             <a:fld id="{AA57E6A9-8A90-E844-B49F-8A8E9126DDB3}" type="datetimeFigureOut">
               <a:rPr lang="en-US" smtClean="0"/>
-              <a:t>2/3/2025</a:t>
+              <a:t>5/21/2025</a:t>
             </a:fld>
             <a:endParaRPr lang="en-US"/>
           </a:p>
@@ -3290,7 +3290,7 @@
           <a:p>
             <a:fld id="{AA57E6A9-8A90-E844-B49F-8A8E9126DDB3}" type="datetimeFigureOut">
               <a:rPr lang="en-US" smtClean="0"/>
-              <a:t>2/3/2025</a:t>
+              <a:t>5/21/2025</a:t>
             </a:fld>
             <a:endParaRPr lang="en-US"/>
           </a:p>
@@ -3503,7 +3503,7 @@
           <a:p>
             <a:fld id="{AA57E6A9-8A90-E844-B49F-8A8E9126DDB3}" type="datetimeFigureOut">
               <a:rPr lang="en-US" smtClean="0"/>
-              <a:t>2/3/2025</a:t>
+              <a:t>5/21/2025</a:t>
             </a:fld>
             <a:endParaRPr lang="en-US"/>
           </a:p>

--- a/PaperFigures/Figure1/Learning_Protocol_Schematic.pptx
+++ b/PaperFigures/Figure1/Learning_Protocol_Schematic.pptx
@@ -6,6 +6,7 @@
   </p:sldMasterIdLst>
   <p:sldIdLst>
     <p:sldId id="256" r:id="rId2"/>
+    <p:sldId id="257" r:id="rId3"/>
   </p:sldIdLst>
   <p:sldSz cx="18000663" cy="10799763"/>
   <p:notesSz cx="6858000" cy="9144000"/>
@@ -106,7 +107,18 @@
   </p:defaultTextStyle>
   <p:extLst>
     <p:ext uri="{EFAFB233-063F-42B5-8137-9DF3F51BA10A}">
-      <p15:sldGuideLst xmlns:p15="http://schemas.microsoft.com/office/powerpoint/2012/main"/>
+      <p15:sldGuideLst xmlns:p15="http://schemas.microsoft.com/office/powerpoint/2012/main">
+        <p15:guide id="1" orient="horz" pos="3402" userDrawn="1">
+          <p15:clr>
+            <a:srgbClr val="A4A3A4"/>
+          </p15:clr>
+        </p15:guide>
+        <p15:guide id="2" pos="5669" userDrawn="1">
+          <p15:clr>
+            <a:srgbClr val="A4A3A4"/>
+          </p15:clr>
+        </p15:guide>
+      </p15:sldGuideLst>
     </p:ext>
   </p:extLst>
 </p:presentation>
@@ -1178,7 +1190,7 @@
           <a:p>
             <a:fld id="{AA57E6A9-8A90-E844-B49F-8A8E9126DDB3}" type="datetimeFigureOut">
               <a:rPr lang="en-US" smtClean="0"/>
-              <a:t>5/21/2025</a:t>
+              <a:t>5/26/2025</a:t>
             </a:fld>
             <a:endParaRPr lang="en-US"/>
           </a:p>
@@ -1348,7 +1360,7 @@
           <a:p>
             <a:fld id="{AA57E6A9-8A90-E844-B49F-8A8E9126DDB3}" type="datetimeFigureOut">
               <a:rPr lang="en-US" smtClean="0"/>
-              <a:t>5/21/2025</a:t>
+              <a:t>5/26/2025</a:t>
             </a:fld>
             <a:endParaRPr lang="en-US"/>
           </a:p>
@@ -1528,7 +1540,7 @@
           <a:p>
             <a:fld id="{AA57E6A9-8A90-E844-B49F-8A8E9126DDB3}" type="datetimeFigureOut">
               <a:rPr lang="en-US" smtClean="0"/>
-              <a:t>5/21/2025</a:t>
+              <a:t>5/26/2025</a:t>
             </a:fld>
             <a:endParaRPr lang="en-US"/>
           </a:p>
@@ -1698,7 +1710,7 @@
           <a:p>
             <a:fld id="{AA57E6A9-8A90-E844-B49F-8A8E9126DDB3}" type="datetimeFigureOut">
               <a:rPr lang="en-US" smtClean="0"/>
-              <a:t>5/21/2025</a:t>
+              <a:t>5/26/2025</a:t>
             </a:fld>
             <a:endParaRPr lang="en-US"/>
           </a:p>
@@ -1944,7 +1956,7 @@
           <a:p>
             <a:fld id="{AA57E6A9-8A90-E844-B49F-8A8E9126DDB3}" type="datetimeFigureOut">
               <a:rPr lang="en-US" smtClean="0"/>
-              <a:t>5/21/2025</a:t>
+              <a:t>5/26/2025</a:t>
             </a:fld>
             <a:endParaRPr lang="en-US"/>
           </a:p>
@@ -2176,7 +2188,7 @@
           <a:p>
             <a:fld id="{AA57E6A9-8A90-E844-B49F-8A8E9126DDB3}" type="datetimeFigureOut">
               <a:rPr lang="en-US" smtClean="0"/>
-              <a:t>5/21/2025</a:t>
+              <a:t>5/26/2025</a:t>
             </a:fld>
             <a:endParaRPr lang="en-US"/>
           </a:p>
@@ -2543,7 +2555,7 @@
           <a:p>
             <a:fld id="{AA57E6A9-8A90-E844-B49F-8A8E9126DDB3}" type="datetimeFigureOut">
               <a:rPr lang="en-US" smtClean="0"/>
-              <a:t>5/21/2025</a:t>
+              <a:t>5/26/2025</a:t>
             </a:fld>
             <a:endParaRPr lang="en-US"/>
           </a:p>
@@ -2661,7 +2673,7 @@
           <a:p>
             <a:fld id="{AA57E6A9-8A90-E844-B49F-8A8E9126DDB3}" type="datetimeFigureOut">
               <a:rPr lang="en-US" smtClean="0"/>
-              <a:t>5/21/2025</a:t>
+              <a:t>5/26/2025</a:t>
             </a:fld>
             <a:endParaRPr lang="en-US"/>
           </a:p>
@@ -2756,7 +2768,7 @@
           <a:p>
             <a:fld id="{AA57E6A9-8A90-E844-B49F-8A8E9126DDB3}" type="datetimeFigureOut">
               <a:rPr lang="en-US" smtClean="0"/>
-              <a:t>5/21/2025</a:t>
+              <a:t>5/26/2025</a:t>
             </a:fld>
             <a:endParaRPr lang="en-US"/>
           </a:p>
@@ -3033,7 +3045,7 @@
           <a:p>
             <a:fld id="{AA57E6A9-8A90-E844-B49F-8A8E9126DDB3}" type="datetimeFigureOut">
               <a:rPr lang="en-US" smtClean="0"/>
-              <a:t>5/21/2025</a:t>
+              <a:t>5/26/2025</a:t>
             </a:fld>
             <a:endParaRPr lang="en-US"/>
           </a:p>
@@ -3290,7 +3302,7 @@
           <a:p>
             <a:fld id="{AA57E6A9-8A90-E844-B49F-8A8E9126DDB3}" type="datetimeFigureOut">
               <a:rPr lang="en-US" smtClean="0"/>
-              <a:t>5/21/2025</a:t>
+              <a:t>5/26/2025</a:t>
             </a:fld>
             <a:endParaRPr lang="en-US"/>
           </a:p>
@@ -3503,7 +3515,7 @@
           <a:p>
             <a:fld id="{AA57E6A9-8A90-E844-B49F-8A8E9126DDB3}" type="datetimeFigureOut">
               <a:rPr lang="en-US" smtClean="0"/>
-              <a:t>5/21/2025</a:t>
+              <a:t>5/26/2025</a:t>
             </a:fld>
             <a:endParaRPr lang="en-US"/>
           </a:p>
@@ -5841,6 +5853,2499 @@
     <p:extLst>
       <p:ext uri="{BB962C8B-B14F-4D97-AF65-F5344CB8AC3E}">
         <p14:creationId xmlns:p14="http://schemas.microsoft.com/office/powerpoint/2010/main" val="4205081063"/>
+      </p:ext>
+    </p:extLst>
+  </p:cSld>
+  <p:clrMapOvr>
+    <a:masterClrMapping/>
+  </p:clrMapOvr>
+</p:sld>
+</file>
+
+<file path=ppt/slides/slide2.xml><?xml version="1.0" encoding="utf-8"?>
+<p:sld xmlns:a="http://schemas.openxmlformats.org/drawingml/2006/main" xmlns:r="http://schemas.openxmlformats.org/officeDocument/2006/relationships" xmlns:p="http://schemas.openxmlformats.org/presentationml/2006/main">
+  <p:cSld>
+    <p:spTree>
+      <p:nvGrpSpPr>
+        <p:cNvPr id="1" name=""/>
+        <p:cNvGrpSpPr/>
+        <p:nvPr/>
+      </p:nvGrpSpPr>
+      <p:grpSpPr>
+        <a:xfrm>
+          <a:off x="0" y="0"/>
+          <a:ext cx="0" cy="0"/>
+          <a:chOff x="0" y="0"/>
+          <a:chExt cx="0" cy="0"/>
+        </a:xfrm>
+      </p:grpSpPr>
+      <p:sp>
+        <p:nvSpPr>
+          <p:cNvPr id="4" name="TextBox 3">
+            <a:extLst>
+              <a:ext uri="{FF2B5EF4-FFF2-40B4-BE49-F238E27FC236}">
+                <a16:creationId xmlns:a16="http://schemas.microsoft.com/office/drawing/2014/main" id="{E4B7C979-DEF8-D480-60A4-7DBBC24DA427}"/>
+              </a:ext>
+            </a:extLst>
+          </p:cNvPr>
+          <p:cNvSpPr txBox="1"/>
+          <p:nvPr/>
+        </p:nvSpPr>
+        <p:spPr>
+          <a:xfrm>
+            <a:off x="15336964" y="9419909"/>
+            <a:ext cx="1611467" cy="830997"/>
+          </a:xfrm>
+          <a:prstGeom prst="rect">
+            <a:avLst/>
+          </a:prstGeom>
+          <a:noFill/>
+        </p:spPr>
+        <p:txBody>
+          <a:bodyPr wrap="none" rtlCol="0">
+            <a:spAutoFit/>
+          </a:bodyPr>
+          <a:lstStyle/>
+          <a:p>
+            <a:r>
+              <a:rPr lang="en-CA" sz="4800" b="1" dirty="0">
+                <a:latin typeface="Arial" panose="020B0604020202020204" pitchFamily="34" charset="0"/>
+                <a:cs typeface="Arial" panose="020B0604020202020204" pitchFamily="34" charset="0"/>
+              </a:rPr>
+              <a:t>Time</a:t>
+            </a:r>
+          </a:p>
+        </p:txBody>
+      </p:sp>
+      <p:sp>
+        <p:nvSpPr>
+          <p:cNvPr id="5" name="Rectangle 4">
+            <a:extLst>
+              <a:ext uri="{FF2B5EF4-FFF2-40B4-BE49-F238E27FC236}">
+                <a16:creationId xmlns:a16="http://schemas.microsoft.com/office/drawing/2014/main" id="{C97E6869-3952-8A7B-1E13-121110646F18}"/>
+              </a:ext>
+            </a:extLst>
+          </p:cNvPr>
+          <p:cNvSpPr/>
+          <p:nvPr/>
+        </p:nvSpPr>
+        <p:spPr>
+          <a:xfrm>
+            <a:off x="1527920" y="916350"/>
+            <a:ext cx="2827299" cy="8493194"/>
+          </a:xfrm>
+          <a:prstGeom prst="rect">
+            <a:avLst/>
+          </a:prstGeom>
+          <a:solidFill>
+            <a:schemeClr val="accent5">
+              <a:lumMod val="20000"/>
+              <a:lumOff val="80000"/>
+            </a:schemeClr>
+          </a:solidFill>
+          <a:ln w="57150">
+            <a:solidFill>
+              <a:schemeClr val="accent5">
+                <a:lumMod val="60000"/>
+                <a:lumOff val="40000"/>
+              </a:schemeClr>
+            </a:solidFill>
+            <a:prstDash val="dash"/>
+          </a:ln>
+        </p:spPr>
+        <p:style>
+          <a:lnRef idx="1">
+            <a:schemeClr val="accent5"/>
+          </a:lnRef>
+          <a:fillRef idx="2">
+            <a:schemeClr val="accent5"/>
+          </a:fillRef>
+          <a:effectRef idx="1">
+            <a:schemeClr val="accent5"/>
+          </a:effectRef>
+          <a:fontRef idx="minor">
+            <a:schemeClr val="dk1"/>
+          </a:fontRef>
+        </p:style>
+        <p:txBody>
+          <a:bodyPr rtlCol="0" anchor="ctr"/>
+          <a:lstStyle/>
+          <a:p>
+            <a:pPr algn="ctr"/>
+            <a:endParaRPr lang="en-CA" sz="1114" b="1"/>
+          </a:p>
+        </p:txBody>
+      </p:sp>
+      <p:sp>
+        <p:nvSpPr>
+          <p:cNvPr id="10" name="TextBox 9">
+            <a:extLst>
+              <a:ext uri="{FF2B5EF4-FFF2-40B4-BE49-F238E27FC236}">
+                <a16:creationId xmlns:a16="http://schemas.microsoft.com/office/drawing/2014/main" id="{6A1FA293-29CF-65C5-E2B4-E5504615C917}"/>
+              </a:ext>
+            </a:extLst>
+          </p:cNvPr>
+          <p:cNvSpPr txBox="1"/>
+          <p:nvPr/>
+        </p:nvSpPr>
+        <p:spPr>
+          <a:xfrm>
+            <a:off x="2107126" y="1513985"/>
+            <a:ext cx="1222835" cy="523092"/>
+          </a:xfrm>
+          <a:prstGeom prst="rect">
+            <a:avLst/>
+          </a:prstGeom>
+          <a:noFill/>
+        </p:spPr>
+        <p:txBody>
+          <a:bodyPr wrap="none" rtlCol="0">
+            <a:spAutoFit/>
+          </a:bodyPr>
+          <a:lstStyle/>
+          <a:p>
+            <a:r>
+              <a:rPr lang="en-CA" sz="2799" b="1" dirty="0">
+                <a:latin typeface="Arial" panose="020B0604020202020204" pitchFamily="34" charset="0"/>
+                <a:cs typeface="Arial" panose="020B0604020202020204" pitchFamily="34" charset="0"/>
+              </a:rPr>
+              <a:t>Trial 1</a:t>
+            </a:r>
+          </a:p>
+        </p:txBody>
+      </p:sp>
+      <p:sp>
+        <p:nvSpPr>
+          <p:cNvPr id="11" name="Rectangle 10">
+            <a:extLst>
+              <a:ext uri="{FF2B5EF4-FFF2-40B4-BE49-F238E27FC236}">
+                <a16:creationId xmlns:a16="http://schemas.microsoft.com/office/drawing/2014/main" id="{DE0FA503-6EC8-B8BA-8AA2-AF082B084592}"/>
+              </a:ext>
+            </a:extLst>
+          </p:cNvPr>
+          <p:cNvSpPr/>
+          <p:nvPr/>
+        </p:nvSpPr>
+        <p:spPr>
+          <a:xfrm>
+            <a:off x="2114066" y="2227703"/>
+            <a:ext cx="463163" cy="7181841"/>
+          </a:xfrm>
+          <a:prstGeom prst="rect">
+            <a:avLst/>
+          </a:prstGeom>
+          <a:solidFill>
+            <a:schemeClr val="accent5"/>
+          </a:solidFill>
+          <a:ln w="28575">
+            <a:solidFill>
+              <a:schemeClr val="tx1"/>
+            </a:solidFill>
+          </a:ln>
+        </p:spPr>
+        <p:style>
+          <a:lnRef idx="1">
+            <a:schemeClr val="accent5"/>
+          </a:lnRef>
+          <a:fillRef idx="2">
+            <a:schemeClr val="accent5"/>
+          </a:fillRef>
+          <a:effectRef idx="1">
+            <a:schemeClr val="accent5"/>
+          </a:effectRef>
+          <a:fontRef idx="minor">
+            <a:schemeClr val="dk1"/>
+          </a:fontRef>
+        </p:style>
+        <p:txBody>
+          <a:bodyPr rtlCol="0" anchor="ctr"/>
+          <a:lstStyle/>
+          <a:p>
+            <a:pPr algn="ctr"/>
+            <a:endParaRPr lang="en-CA" sz="1114"/>
+          </a:p>
+        </p:txBody>
+      </p:sp>
+      <p:cxnSp>
+        <p:nvCxnSpPr>
+          <p:cNvPr id="12" name="Straight Arrow Connector 11">
+            <a:extLst>
+              <a:ext uri="{FF2B5EF4-FFF2-40B4-BE49-F238E27FC236}">
+                <a16:creationId xmlns:a16="http://schemas.microsoft.com/office/drawing/2014/main" id="{BB0E44D5-C779-66FC-0DC6-87BCDB943AA6}"/>
+              </a:ext>
+            </a:extLst>
+          </p:cNvPr>
+          <p:cNvCxnSpPr>
+            <a:cxnSpLocks/>
+          </p:cNvCxnSpPr>
+          <p:nvPr/>
+        </p:nvCxnSpPr>
+        <p:spPr>
+          <a:xfrm flipV="1">
+            <a:off x="1527917" y="894202"/>
+            <a:ext cx="0" cy="8525709"/>
+          </a:xfrm>
+          <a:prstGeom prst="straightConnector1">
+            <a:avLst/>
+          </a:prstGeom>
+          <a:ln w="76200">
+            <a:solidFill>
+              <a:schemeClr val="tx1"/>
+            </a:solidFill>
+            <a:tailEnd type="triangle"/>
+          </a:ln>
+        </p:spPr>
+        <p:style>
+          <a:lnRef idx="1">
+            <a:schemeClr val="accent1"/>
+          </a:lnRef>
+          <a:fillRef idx="0">
+            <a:schemeClr val="accent1"/>
+          </a:fillRef>
+          <a:effectRef idx="0">
+            <a:schemeClr val="accent1"/>
+          </a:effectRef>
+          <a:fontRef idx="minor">
+            <a:schemeClr val="tx1"/>
+          </a:fontRef>
+        </p:style>
+      </p:cxnSp>
+      <mc:AlternateContent xmlns:mc="http://schemas.openxmlformats.org/markup-compatibility/2006">
+        <mc:Choice xmlns:a14="http://schemas.microsoft.com/office/drawing/2010/main" Requires="a14">
+          <p:sp>
+            <p:nvSpPr>
+              <p:cNvPr id="13" name="TextBox 12">
+                <a:extLst>
+                  <a:ext uri="{FF2B5EF4-FFF2-40B4-BE49-F238E27FC236}">
+                    <a16:creationId xmlns:a16="http://schemas.microsoft.com/office/drawing/2014/main" id="{FD293864-188F-CAE0-8D01-A83F36510C26}"/>
+                  </a:ext>
+                </a:extLst>
+              </p:cNvPr>
+              <p:cNvSpPr txBox="1"/>
+              <p:nvPr/>
+            </p:nvSpPr>
+            <p:spPr>
+              <a:xfrm>
+                <a:off x="0" y="4979875"/>
+                <a:ext cx="1569335" cy="1628779"/>
+              </a:xfrm>
+              <a:prstGeom prst="rect">
+                <a:avLst/>
+              </a:prstGeom>
+              <a:noFill/>
+            </p:spPr>
+            <p:txBody>
+              <a:bodyPr wrap="square" rtlCol="0">
+                <a:spAutoFit/>
+              </a:bodyPr>
+              <a:lstStyle/>
+              <a:p>
+                <a14:m>
+                  <m:oMath xmlns:m="http://schemas.openxmlformats.org/officeDocument/2006/math">
+                    <m:sSubSup>
+                      <m:sSubSupPr>
+                        <m:ctrlPr>
+                          <a:rPr lang="en-CA" sz="4800" b="1" i="1" smtClean="0">
+                            <a:latin typeface="Cambria Math" panose="02040503050406030204" pitchFamily="18" charset="0"/>
+                            <a:cs typeface="Arial" panose="020B0604020202020204" pitchFamily="34" charset="0"/>
+                          </a:rPr>
+                        </m:ctrlPr>
+                      </m:sSubSupPr>
+                      <m:e>
+                        <m:r>
+                          <a:rPr lang="en-US" sz="4800" b="1" i="1" smtClean="0">
+                            <a:latin typeface="Cambria Math" panose="02040503050406030204" pitchFamily="18" charset="0"/>
+                            <a:cs typeface="Arial" panose="020B0604020202020204" pitchFamily="34" charset="0"/>
+                          </a:rPr>
+                          <m:t>𝑰</m:t>
+                        </m:r>
+                      </m:e>
+                      <m:sub>
+                        <m:r>
+                          <a:rPr lang="en-US" sz="4800" b="1" i="1" smtClean="0">
+                            <a:latin typeface="Cambria Math" panose="02040503050406030204" pitchFamily="18" charset="0"/>
+                            <a:cs typeface="Arial" panose="020B0604020202020204" pitchFamily="34" charset="0"/>
+                          </a:rPr>
+                          <m:t>𝒊</m:t>
+                        </m:r>
+                      </m:sub>
+                      <m:sup>
+                        <m:r>
+                          <a:rPr lang="en-US" sz="4800" b="1" i="1" smtClean="0">
+                            <a:latin typeface="Cambria Math" panose="02040503050406030204" pitchFamily="18" charset="0"/>
+                            <a:cs typeface="Arial" panose="020B0604020202020204" pitchFamily="34" charset="0"/>
+                          </a:rPr>
+                          <m:t>𝒔𝒕𝒊𝒎</m:t>
+                        </m:r>
+                      </m:sup>
+                    </m:sSubSup>
+                  </m:oMath>
+                </a14:m>
+                <a:r>
+                  <a:rPr lang="en-CA" sz="4800" b="1" dirty="0">
+                    <a:latin typeface="Arial" panose="020B0604020202020204" pitchFamily="34" charset="0"/>
+                    <a:cs typeface="Arial" panose="020B0604020202020204" pitchFamily="34" charset="0"/>
+                  </a:rPr>
+                  <a:t> 	</a:t>
+                </a:r>
+              </a:p>
+            </p:txBody>
+          </p:sp>
+        </mc:Choice>
+        <mc:Fallback>
+          <p:sp>
+            <p:nvSpPr>
+              <p:cNvPr id="13" name="TextBox 12">
+                <a:extLst>
+                  <a:ext uri="{FF2B5EF4-FFF2-40B4-BE49-F238E27FC236}">
+                    <a16:creationId xmlns:a16="http://schemas.microsoft.com/office/drawing/2014/main" id="{FD293864-188F-CAE0-8D01-A83F36510C26}"/>
+                  </a:ext>
+                </a:extLst>
+              </p:cNvPr>
+              <p:cNvSpPr txBox="1">
+                <a:spLocks noRot="1" noChangeAspect="1" noMove="1" noResize="1" noEditPoints="1" noAdjustHandles="1" noChangeArrowheads="1" noChangeShapeType="1" noTextEdit="1"/>
+              </p:cNvSpPr>
+              <p:nvPr/>
+            </p:nvSpPr>
+            <p:spPr>
+              <a:xfrm>
+                <a:off x="0" y="4979875"/>
+                <a:ext cx="1569335" cy="1628779"/>
+              </a:xfrm>
+              <a:prstGeom prst="rect">
+                <a:avLst/>
+              </a:prstGeom>
+              <a:blipFill>
+                <a:blip r:embed="rId2"/>
+                <a:stretch>
+                  <a:fillRect/>
+                </a:stretch>
+              </a:blipFill>
+            </p:spPr>
+            <p:txBody>
+              <a:bodyPr/>
+              <a:lstStyle/>
+              <a:p>
+                <a:r>
+                  <a:rPr lang="en-CA">
+                    <a:noFill/>
+                  </a:rPr>
+                  <a:t> </a:t>
+                </a:r>
+              </a:p>
+            </p:txBody>
+          </p:sp>
+        </mc:Fallback>
+      </mc:AlternateContent>
+      <p:cxnSp>
+        <p:nvCxnSpPr>
+          <p:cNvPr id="14" name="Straight Arrow Connector 13">
+            <a:extLst>
+              <a:ext uri="{FF2B5EF4-FFF2-40B4-BE49-F238E27FC236}">
+                <a16:creationId xmlns:a16="http://schemas.microsoft.com/office/drawing/2014/main" id="{75904C71-031D-C801-82E8-C77DA23C5543}"/>
+              </a:ext>
+            </a:extLst>
+          </p:cNvPr>
+          <p:cNvCxnSpPr>
+            <a:cxnSpLocks/>
+          </p:cNvCxnSpPr>
+          <p:nvPr/>
+        </p:nvCxnSpPr>
+        <p:spPr>
+          <a:xfrm>
+            <a:off x="2114066" y="8219266"/>
+            <a:ext cx="463663" cy="0"/>
+          </a:xfrm>
+          <a:prstGeom prst="straightConnector1">
+            <a:avLst/>
+          </a:prstGeom>
+          <a:ln w="38100">
+            <a:solidFill>
+              <a:schemeClr val="tx1"/>
+            </a:solidFill>
+            <a:headEnd type="triangle"/>
+            <a:tailEnd type="triangle"/>
+          </a:ln>
+        </p:spPr>
+        <p:style>
+          <a:lnRef idx="1">
+            <a:schemeClr val="accent1"/>
+          </a:lnRef>
+          <a:fillRef idx="0">
+            <a:schemeClr val="accent1"/>
+          </a:fillRef>
+          <a:effectRef idx="0">
+            <a:schemeClr val="accent1"/>
+          </a:effectRef>
+          <a:fontRef idx="minor">
+            <a:schemeClr val="tx1"/>
+          </a:fontRef>
+        </p:style>
+      </p:cxnSp>
+      <p:sp>
+        <p:nvSpPr>
+          <p:cNvPr id="15" name="TextBox 14">
+            <a:extLst>
+              <a:ext uri="{FF2B5EF4-FFF2-40B4-BE49-F238E27FC236}">
+                <a16:creationId xmlns:a16="http://schemas.microsoft.com/office/drawing/2014/main" id="{9C4E0791-66DE-127F-C508-F7E8EFA02572}"/>
+              </a:ext>
+            </a:extLst>
+          </p:cNvPr>
+          <p:cNvSpPr txBox="1"/>
+          <p:nvPr/>
+        </p:nvSpPr>
+        <p:spPr>
+          <a:xfrm>
+            <a:off x="2573912" y="7897531"/>
+            <a:ext cx="1003801" cy="523092"/>
+          </a:xfrm>
+          <a:prstGeom prst="rect">
+            <a:avLst/>
+          </a:prstGeom>
+          <a:noFill/>
+        </p:spPr>
+        <p:txBody>
+          <a:bodyPr wrap="none" rtlCol="0">
+            <a:spAutoFit/>
+          </a:bodyPr>
+          <a:lstStyle/>
+          <a:p>
+            <a:r>
+              <a:rPr lang="en-CA" sz="2799" b="1" dirty="0">
+                <a:latin typeface="Arial" panose="020B0604020202020204" pitchFamily="34" charset="0"/>
+                <a:cs typeface="Arial" panose="020B0604020202020204" pitchFamily="34" charset="0"/>
+              </a:rPr>
+              <a:t>2 </a:t>
+            </a:r>
+            <a:r>
+              <a:rPr lang="en-CA" sz="2799" b="1" dirty="0" err="1">
+                <a:latin typeface="Arial" panose="020B0604020202020204" pitchFamily="34" charset="0"/>
+                <a:cs typeface="Arial" panose="020B0604020202020204" pitchFamily="34" charset="0"/>
+              </a:rPr>
+              <a:t>ms</a:t>
+            </a:r>
+            <a:endParaRPr lang="en-CA" sz="2799" b="1" dirty="0">
+              <a:latin typeface="Arial" panose="020B0604020202020204" pitchFamily="34" charset="0"/>
+              <a:cs typeface="Arial" panose="020B0604020202020204" pitchFamily="34" charset="0"/>
+            </a:endParaRPr>
+          </a:p>
+        </p:txBody>
+      </p:sp>
+      <p:sp>
+        <p:nvSpPr>
+          <p:cNvPr id="16" name="TextBox 15">
+            <a:extLst>
+              <a:ext uri="{FF2B5EF4-FFF2-40B4-BE49-F238E27FC236}">
+                <a16:creationId xmlns:a16="http://schemas.microsoft.com/office/drawing/2014/main" id="{CA554EBF-ABB3-86AC-C4CA-B92BF1E2CEAF}"/>
+              </a:ext>
+            </a:extLst>
+          </p:cNvPr>
+          <p:cNvSpPr txBox="1"/>
+          <p:nvPr/>
+        </p:nvSpPr>
+        <p:spPr>
+          <a:xfrm>
+            <a:off x="5863393" y="0"/>
+            <a:ext cx="6210354" cy="830997"/>
+          </a:xfrm>
+          <a:prstGeom prst="rect">
+            <a:avLst/>
+          </a:prstGeom>
+          <a:noFill/>
+        </p:spPr>
+        <p:txBody>
+          <a:bodyPr wrap="none" rtlCol="0">
+            <a:spAutoFit/>
+          </a:bodyPr>
+          <a:lstStyle/>
+          <a:p>
+            <a:r>
+              <a:rPr lang="en-CA" sz="4800" b="1" dirty="0">
+                <a:latin typeface="Arial" panose="020B0604020202020204" pitchFamily="34" charset="0"/>
+                <a:cs typeface="Arial" panose="020B0604020202020204" pitchFamily="34" charset="0"/>
+              </a:rPr>
+              <a:t>Stimulation Protocol</a:t>
+            </a:r>
+          </a:p>
+        </p:txBody>
+      </p:sp>
+      <p:sp>
+        <p:nvSpPr>
+          <p:cNvPr id="17" name="Oval 16">
+            <a:extLst>
+              <a:ext uri="{FF2B5EF4-FFF2-40B4-BE49-F238E27FC236}">
+                <a16:creationId xmlns:a16="http://schemas.microsoft.com/office/drawing/2014/main" id="{A2E33A04-50F2-2E91-41F3-86E5B6E3FF5E}"/>
+              </a:ext>
+            </a:extLst>
+          </p:cNvPr>
+          <p:cNvSpPr/>
+          <p:nvPr/>
+        </p:nvSpPr>
+        <p:spPr>
+          <a:xfrm>
+            <a:off x="10525246" y="5894892"/>
+            <a:ext cx="180000" cy="180000"/>
+          </a:xfrm>
+          <a:prstGeom prst="ellipse">
+            <a:avLst/>
+          </a:prstGeom>
+          <a:solidFill>
+            <a:schemeClr val="tx1"/>
+          </a:solidFill>
+          <a:ln>
+            <a:solidFill>
+              <a:schemeClr val="bg1"/>
+            </a:solidFill>
+          </a:ln>
+        </p:spPr>
+        <p:style>
+          <a:lnRef idx="1">
+            <a:schemeClr val="dk1"/>
+          </a:lnRef>
+          <a:fillRef idx="2">
+            <a:schemeClr val="dk1"/>
+          </a:fillRef>
+          <a:effectRef idx="1">
+            <a:schemeClr val="dk1"/>
+          </a:effectRef>
+          <a:fontRef idx="minor">
+            <a:schemeClr val="dk1"/>
+          </a:fontRef>
+        </p:style>
+        <p:txBody>
+          <a:bodyPr rtlCol="0" anchor="ctr"/>
+          <a:lstStyle/>
+          <a:p>
+            <a:pPr algn="ctr"/>
+            <a:endParaRPr lang="en-CA" sz="999"/>
+          </a:p>
+        </p:txBody>
+      </p:sp>
+      <p:sp>
+        <p:nvSpPr>
+          <p:cNvPr id="18" name="Oval 17">
+            <a:extLst>
+              <a:ext uri="{FF2B5EF4-FFF2-40B4-BE49-F238E27FC236}">
+                <a16:creationId xmlns:a16="http://schemas.microsoft.com/office/drawing/2014/main" id="{36D52937-FFD7-A49D-705C-363A548F2A38}"/>
+              </a:ext>
+            </a:extLst>
+          </p:cNvPr>
+          <p:cNvSpPr/>
+          <p:nvPr/>
+        </p:nvSpPr>
+        <p:spPr>
+          <a:xfrm>
+            <a:off x="10767949" y="5890922"/>
+            <a:ext cx="180000" cy="180000"/>
+          </a:xfrm>
+          <a:prstGeom prst="ellipse">
+            <a:avLst/>
+          </a:prstGeom>
+          <a:solidFill>
+            <a:schemeClr val="tx1"/>
+          </a:solidFill>
+          <a:ln>
+            <a:solidFill>
+              <a:schemeClr val="bg1"/>
+            </a:solidFill>
+          </a:ln>
+        </p:spPr>
+        <p:style>
+          <a:lnRef idx="1">
+            <a:schemeClr val="dk1"/>
+          </a:lnRef>
+          <a:fillRef idx="2">
+            <a:schemeClr val="dk1"/>
+          </a:fillRef>
+          <a:effectRef idx="1">
+            <a:schemeClr val="dk1"/>
+          </a:effectRef>
+          <a:fontRef idx="minor">
+            <a:schemeClr val="dk1"/>
+          </a:fontRef>
+        </p:style>
+        <p:txBody>
+          <a:bodyPr rtlCol="0" anchor="ctr"/>
+          <a:lstStyle/>
+          <a:p>
+            <a:pPr algn="ctr"/>
+            <a:endParaRPr lang="en-CA" sz="999"/>
+          </a:p>
+        </p:txBody>
+      </p:sp>
+      <p:sp>
+        <p:nvSpPr>
+          <p:cNvPr id="19" name="Oval 18">
+            <a:extLst>
+              <a:ext uri="{FF2B5EF4-FFF2-40B4-BE49-F238E27FC236}">
+                <a16:creationId xmlns:a16="http://schemas.microsoft.com/office/drawing/2014/main" id="{2676EB71-5620-335E-EEAB-7131A9A441CA}"/>
+              </a:ext>
+            </a:extLst>
+          </p:cNvPr>
+          <p:cNvSpPr/>
+          <p:nvPr/>
+        </p:nvSpPr>
+        <p:spPr>
+          <a:xfrm>
+            <a:off x="11026690" y="5890922"/>
+            <a:ext cx="180000" cy="180000"/>
+          </a:xfrm>
+          <a:prstGeom prst="ellipse">
+            <a:avLst/>
+          </a:prstGeom>
+          <a:solidFill>
+            <a:schemeClr val="tx1"/>
+          </a:solidFill>
+          <a:ln>
+            <a:solidFill>
+              <a:schemeClr val="bg1"/>
+            </a:solidFill>
+          </a:ln>
+        </p:spPr>
+        <p:style>
+          <a:lnRef idx="1">
+            <a:schemeClr val="dk1"/>
+          </a:lnRef>
+          <a:fillRef idx="2">
+            <a:schemeClr val="dk1"/>
+          </a:fillRef>
+          <a:effectRef idx="1">
+            <a:schemeClr val="dk1"/>
+          </a:effectRef>
+          <a:fontRef idx="minor">
+            <a:schemeClr val="dk1"/>
+          </a:fontRef>
+        </p:style>
+        <p:txBody>
+          <a:bodyPr rtlCol="0" anchor="ctr"/>
+          <a:lstStyle/>
+          <a:p>
+            <a:pPr algn="ctr"/>
+            <a:endParaRPr lang="en-CA" sz="999"/>
+          </a:p>
+        </p:txBody>
+      </p:sp>
+      <p:sp>
+        <p:nvSpPr>
+          <p:cNvPr id="45" name="Rectangle 44">
+            <a:extLst>
+              <a:ext uri="{FF2B5EF4-FFF2-40B4-BE49-F238E27FC236}">
+                <a16:creationId xmlns:a16="http://schemas.microsoft.com/office/drawing/2014/main" id="{1D2B5FA2-48DA-8643-C168-ECDD590306AA}"/>
+              </a:ext>
+            </a:extLst>
+          </p:cNvPr>
+          <p:cNvSpPr/>
+          <p:nvPr/>
+        </p:nvSpPr>
+        <p:spPr>
+          <a:xfrm>
+            <a:off x="4324305" y="903803"/>
+            <a:ext cx="2827299" cy="8493194"/>
+          </a:xfrm>
+          <a:prstGeom prst="rect">
+            <a:avLst/>
+          </a:prstGeom>
+          <a:solidFill>
+            <a:schemeClr val="accent5">
+              <a:lumMod val="20000"/>
+              <a:lumOff val="80000"/>
+            </a:schemeClr>
+          </a:solidFill>
+          <a:ln w="57150">
+            <a:solidFill>
+              <a:schemeClr val="accent5">
+                <a:lumMod val="60000"/>
+                <a:lumOff val="40000"/>
+              </a:schemeClr>
+            </a:solidFill>
+            <a:prstDash val="dash"/>
+          </a:ln>
+        </p:spPr>
+        <p:style>
+          <a:lnRef idx="1">
+            <a:schemeClr val="accent5"/>
+          </a:lnRef>
+          <a:fillRef idx="2">
+            <a:schemeClr val="accent5"/>
+          </a:fillRef>
+          <a:effectRef idx="1">
+            <a:schemeClr val="accent5"/>
+          </a:effectRef>
+          <a:fontRef idx="minor">
+            <a:schemeClr val="dk1"/>
+          </a:fontRef>
+        </p:style>
+        <p:txBody>
+          <a:bodyPr rtlCol="0" anchor="ctr"/>
+          <a:lstStyle/>
+          <a:p>
+            <a:pPr algn="ctr"/>
+            <a:endParaRPr lang="en-CA" sz="1114" b="1"/>
+          </a:p>
+        </p:txBody>
+      </p:sp>
+      <p:sp>
+        <p:nvSpPr>
+          <p:cNvPr id="46" name="TextBox 45">
+            <a:extLst>
+              <a:ext uri="{FF2B5EF4-FFF2-40B4-BE49-F238E27FC236}">
+                <a16:creationId xmlns:a16="http://schemas.microsoft.com/office/drawing/2014/main" id="{60C7D28B-F76A-33DA-6FDC-0DB106191F3C}"/>
+              </a:ext>
+            </a:extLst>
+          </p:cNvPr>
+          <p:cNvSpPr txBox="1"/>
+          <p:nvPr/>
+        </p:nvSpPr>
+        <p:spPr>
+          <a:xfrm>
+            <a:off x="4903511" y="1501438"/>
+            <a:ext cx="1222835" cy="523092"/>
+          </a:xfrm>
+          <a:prstGeom prst="rect">
+            <a:avLst/>
+          </a:prstGeom>
+          <a:noFill/>
+        </p:spPr>
+        <p:txBody>
+          <a:bodyPr wrap="none" rtlCol="0">
+            <a:spAutoFit/>
+          </a:bodyPr>
+          <a:lstStyle/>
+          <a:p>
+            <a:r>
+              <a:rPr lang="en-CA" sz="2799" b="1" dirty="0">
+                <a:latin typeface="Arial" panose="020B0604020202020204" pitchFamily="34" charset="0"/>
+                <a:cs typeface="Arial" panose="020B0604020202020204" pitchFamily="34" charset="0"/>
+              </a:rPr>
+              <a:t>Trial 2</a:t>
+            </a:r>
+          </a:p>
+        </p:txBody>
+      </p:sp>
+      <p:sp>
+        <p:nvSpPr>
+          <p:cNvPr id="47" name="Rectangle 46">
+            <a:extLst>
+              <a:ext uri="{FF2B5EF4-FFF2-40B4-BE49-F238E27FC236}">
+                <a16:creationId xmlns:a16="http://schemas.microsoft.com/office/drawing/2014/main" id="{839934FB-3540-3366-B8D0-B1173D3E77F1}"/>
+              </a:ext>
+            </a:extLst>
+          </p:cNvPr>
+          <p:cNvSpPr/>
+          <p:nvPr/>
+        </p:nvSpPr>
+        <p:spPr>
+          <a:xfrm>
+            <a:off x="4910451" y="2215156"/>
+            <a:ext cx="463163" cy="7181841"/>
+          </a:xfrm>
+          <a:prstGeom prst="rect">
+            <a:avLst/>
+          </a:prstGeom>
+          <a:solidFill>
+            <a:schemeClr val="accent5"/>
+          </a:solidFill>
+          <a:ln w="28575">
+            <a:solidFill>
+              <a:schemeClr val="tx1"/>
+            </a:solidFill>
+          </a:ln>
+        </p:spPr>
+        <p:style>
+          <a:lnRef idx="1">
+            <a:schemeClr val="accent5"/>
+          </a:lnRef>
+          <a:fillRef idx="2">
+            <a:schemeClr val="accent5"/>
+          </a:fillRef>
+          <a:effectRef idx="1">
+            <a:schemeClr val="accent5"/>
+          </a:effectRef>
+          <a:fontRef idx="minor">
+            <a:schemeClr val="dk1"/>
+          </a:fontRef>
+        </p:style>
+        <p:txBody>
+          <a:bodyPr rtlCol="0" anchor="ctr"/>
+          <a:lstStyle/>
+          <a:p>
+            <a:pPr algn="ctr"/>
+            <a:endParaRPr lang="en-CA" sz="1114"/>
+          </a:p>
+        </p:txBody>
+      </p:sp>
+      <p:cxnSp>
+        <p:nvCxnSpPr>
+          <p:cNvPr id="48" name="Straight Arrow Connector 47">
+            <a:extLst>
+              <a:ext uri="{FF2B5EF4-FFF2-40B4-BE49-F238E27FC236}">
+                <a16:creationId xmlns:a16="http://schemas.microsoft.com/office/drawing/2014/main" id="{9ECD4901-4A6E-99FA-1047-67218B8448C9}"/>
+              </a:ext>
+            </a:extLst>
+          </p:cNvPr>
+          <p:cNvCxnSpPr>
+            <a:cxnSpLocks/>
+          </p:cNvCxnSpPr>
+          <p:nvPr/>
+        </p:nvCxnSpPr>
+        <p:spPr>
+          <a:xfrm>
+            <a:off x="4910451" y="8206719"/>
+            <a:ext cx="463663" cy="0"/>
+          </a:xfrm>
+          <a:prstGeom prst="straightConnector1">
+            <a:avLst/>
+          </a:prstGeom>
+          <a:ln w="38100">
+            <a:solidFill>
+              <a:schemeClr val="tx1"/>
+            </a:solidFill>
+            <a:headEnd type="triangle"/>
+            <a:tailEnd type="triangle"/>
+          </a:ln>
+        </p:spPr>
+        <p:style>
+          <a:lnRef idx="1">
+            <a:schemeClr val="accent1"/>
+          </a:lnRef>
+          <a:fillRef idx="0">
+            <a:schemeClr val="accent1"/>
+          </a:fillRef>
+          <a:effectRef idx="0">
+            <a:schemeClr val="accent1"/>
+          </a:effectRef>
+          <a:fontRef idx="minor">
+            <a:schemeClr val="tx1"/>
+          </a:fontRef>
+        </p:style>
+      </p:cxnSp>
+      <p:sp>
+        <p:nvSpPr>
+          <p:cNvPr id="49" name="TextBox 48">
+            <a:extLst>
+              <a:ext uri="{FF2B5EF4-FFF2-40B4-BE49-F238E27FC236}">
+                <a16:creationId xmlns:a16="http://schemas.microsoft.com/office/drawing/2014/main" id="{7154CEAD-E5AE-0E99-EC17-4D6F7E159034}"/>
+              </a:ext>
+            </a:extLst>
+          </p:cNvPr>
+          <p:cNvSpPr txBox="1"/>
+          <p:nvPr/>
+        </p:nvSpPr>
+        <p:spPr>
+          <a:xfrm>
+            <a:off x="5370297" y="7884984"/>
+            <a:ext cx="1003801" cy="523092"/>
+          </a:xfrm>
+          <a:prstGeom prst="rect">
+            <a:avLst/>
+          </a:prstGeom>
+          <a:noFill/>
+        </p:spPr>
+        <p:txBody>
+          <a:bodyPr wrap="none" rtlCol="0">
+            <a:spAutoFit/>
+          </a:bodyPr>
+          <a:lstStyle/>
+          <a:p>
+            <a:r>
+              <a:rPr lang="en-CA" sz="2799" b="1" dirty="0">
+                <a:latin typeface="Arial" panose="020B0604020202020204" pitchFamily="34" charset="0"/>
+                <a:cs typeface="Arial" panose="020B0604020202020204" pitchFamily="34" charset="0"/>
+              </a:rPr>
+              <a:t>2 </a:t>
+            </a:r>
+            <a:r>
+              <a:rPr lang="en-CA" sz="2799" b="1" dirty="0" err="1">
+                <a:latin typeface="Arial" panose="020B0604020202020204" pitchFamily="34" charset="0"/>
+                <a:cs typeface="Arial" panose="020B0604020202020204" pitchFamily="34" charset="0"/>
+              </a:rPr>
+              <a:t>ms</a:t>
+            </a:r>
+            <a:endParaRPr lang="en-CA" sz="2799" b="1" dirty="0">
+              <a:latin typeface="Arial" panose="020B0604020202020204" pitchFamily="34" charset="0"/>
+              <a:cs typeface="Arial" panose="020B0604020202020204" pitchFamily="34" charset="0"/>
+            </a:endParaRPr>
+          </a:p>
+        </p:txBody>
+      </p:sp>
+      <p:sp>
+        <p:nvSpPr>
+          <p:cNvPr id="55" name="Rectangle 54">
+            <a:extLst>
+              <a:ext uri="{FF2B5EF4-FFF2-40B4-BE49-F238E27FC236}">
+                <a16:creationId xmlns:a16="http://schemas.microsoft.com/office/drawing/2014/main" id="{6B699C85-8BFE-7DA9-8A57-3CE3F7977055}"/>
+              </a:ext>
+            </a:extLst>
+          </p:cNvPr>
+          <p:cNvSpPr/>
+          <p:nvPr/>
+        </p:nvSpPr>
+        <p:spPr>
+          <a:xfrm>
+            <a:off x="7149674" y="892728"/>
+            <a:ext cx="2827299" cy="8493194"/>
+          </a:xfrm>
+          <a:prstGeom prst="rect">
+            <a:avLst/>
+          </a:prstGeom>
+          <a:solidFill>
+            <a:schemeClr val="accent5">
+              <a:lumMod val="20000"/>
+              <a:lumOff val="80000"/>
+            </a:schemeClr>
+          </a:solidFill>
+          <a:ln w="57150">
+            <a:solidFill>
+              <a:schemeClr val="accent5">
+                <a:lumMod val="60000"/>
+                <a:lumOff val="40000"/>
+              </a:schemeClr>
+            </a:solidFill>
+            <a:prstDash val="dash"/>
+          </a:ln>
+        </p:spPr>
+        <p:style>
+          <a:lnRef idx="1">
+            <a:schemeClr val="accent5"/>
+          </a:lnRef>
+          <a:fillRef idx="2">
+            <a:schemeClr val="accent5"/>
+          </a:fillRef>
+          <a:effectRef idx="1">
+            <a:schemeClr val="accent5"/>
+          </a:effectRef>
+          <a:fontRef idx="minor">
+            <a:schemeClr val="dk1"/>
+          </a:fontRef>
+        </p:style>
+        <p:txBody>
+          <a:bodyPr rtlCol="0" anchor="ctr"/>
+          <a:lstStyle/>
+          <a:p>
+            <a:pPr algn="ctr"/>
+            <a:endParaRPr lang="en-CA" sz="1114" b="1"/>
+          </a:p>
+        </p:txBody>
+      </p:sp>
+      <p:sp>
+        <p:nvSpPr>
+          <p:cNvPr id="56" name="TextBox 55">
+            <a:extLst>
+              <a:ext uri="{FF2B5EF4-FFF2-40B4-BE49-F238E27FC236}">
+                <a16:creationId xmlns:a16="http://schemas.microsoft.com/office/drawing/2014/main" id="{19611CA6-A7D9-12EF-FB97-2762508F8308}"/>
+              </a:ext>
+            </a:extLst>
+          </p:cNvPr>
+          <p:cNvSpPr txBox="1"/>
+          <p:nvPr/>
+        </p:nvSpPr>
+        <p:spPr>
+          <a:xfrm>
+            <a:off x="7728880" y="1490363"/>
+            <a:ext cx="1222835" cy="523092"/>
+          </a:xfrm>
+          <a:prstGeom prst="rect">
+            <a:avLst/>
+          </a:prstGeom>
+          <a:noFill/>
+        </p:spPr>
+        <p:txBody>
+          <a:bodyPr wrap="none" rtlCol="0">
+            <a:spAutoFit/>
+          </a:bodyPr>
+          <a:lstStyle/>
+          <a:p>
+            <a:r>
+              <a:rPr lang="en-CA" sz="2799" b="1" dirty="0">
+                <a:latin typeface="Arial" panose="020B0604020202020204" pitchFamily="34" charset="0"/>
+                <a:cs typeface="Arial" panose="020B0604020202020204" pitchFamily="34" charset="0"/>
+              </a:rPr>
+              <a:t>Trial 3</a:t>
+            </a:r>
+          </a:p>
+        </p:txBody>
+      </p:sp>
+      <p:sp>
+        <p:nvSpPr>
+          <p:cNvPr id="57" name="Rectangle 56">
+            <a:extLst>
+              <a:ext uri="{FF2B5EF4-FFF2-40B4-BE49-F238E27FC236}">
+                <a16:creationId xmlns:a16="http://schemas.microsoft.com/office/drawing/2014/main" id="{B07CCC31-AB46-A898-61E0-72490A8BE930}"/>
+              </a:ext>
+            </a:extLst>
+          </p:cNvPr>
+          <p:cNvSpPr/>
+          <p:nvPr/>
+        </p:nvSpPr>
+        <p:spPr>
+          <a:xfrm>
+            <a:off x="7735820" y="2204081"/>
+            <a:ext cx="463163" cy="7181841"/>
+          </a:xfrm>
+          <a:prstGeom prst="rect">
+            <a:avLst/>
+          </a:prstGeom>
+          <a:solidFill>
+            <a:schemeClr val="accent5"/>
+          </a:solidFill>
+          <a:ln w="28575">
+            <a:solidFill>
+              <a:schemeClr val="tx1"/>
+            </a:solidFill>
+          </a:ln>
+        </p:spPr>
+        <p:style>
+          <a:lnRef idx="1">
+            <a:schemeClr val="accent5"/>
+          </a:lnRef>
+          <a:fillRef idx="2">
+            <a:schemeClr val="accent5"/>
+          </a:fillRef>
+          <a:effectRef idx="1">
+            <a:schemeClr val="accent5"/>
+          </a:effectRef>
+          <a:fontRef idx="minor">
+            <a:schemeClr val="dk1"/>
+          </a:fontRef>
+        </p:style>
+        <p:txBody>
+          <a:bodyPr rtlCol="0" anchor="ctr"/>
+          <a:lstStyle/>
+          <a:p>
+            <a:pPr algn="ctr"/>
+            <a:endParaRPr lang="en-CA" sz="1114"/>
+          </a:p>
+        </p:txBody>
+      </p:sp>
+      <p:cxnSp>
+        <p:nvCxnSpPr>
+          <p:cNvPr id="58" name="Straight Arrow Connector 57">
+            <a:extLst>
+              <a:ext uri="{FF2B5EF4-FFF2-40B4-BE49-F238E27FC236}">
+                <a16:creationId xmlns:a16="http://schemas.microsoft.com/office/drawing/2014/main" id="{777EE950-329F-F1AD-D1CB-A53992AFF91A}"/>
+              </a:ext>
+            </a:extLst>
+          </p:cNvPr>
+          <p:cNvCxnSpPr>
+            <a:cxnSpLocks/>
+          </p:cNvCxnSpPr>
+          <p:nvPr/>
+        </p:nvCxnSpPr>
+        <p:spPr>
+          <a:xfrm>
+            <a:off x="7735820" y="8195644"/>
+            <a:ext cx="463663" cy="0"/>
+          </a:xfrm>
+          <a:prstGeom prst="straightConnector1">
+            <a:avLst/>
+          </a:prstGeom>
+          <a:ln w="38100">
+            <a:solidFill>
+              <a:schemeClr val="tx1"/>
+            </a:solidFill>
+            <a:headEnd type="triangle"/>
+            <a:tailEnd type="triangle"/>
+          </a:ln>
+        </p:spPr>
+        <p:style>
+          <a:lnRef idx="1">
+            <a:schemeClr val="accent1"/>
+          </a:lnRef>
+          <a:fillRef idx="0">
+            <a:schemeClr val="accent1"/>
+          </a:fillRef>
+          <a:effectRef idx="0">
+            <a:schemeClr val="accent1"/>
+          </a:effectRef>
+          <a:fontRef idx="minor">
+            <a:schemeClr val="tx1"/>
+          </a:fontRef>
+        </p:style>
+      </p:cxnSp>
+      <p:sp>
+        <p:nvSpPr>
+          <p:cNvPr id="59" name="TextBox 58">
+            <a:extLst>
+              <a:ext uri="{FF2B5EF4-FFF2-40B4-BE49-F238E27FC236}">
+                <a16:creationId xmlns:a16="http://schemas.microsoft.com/office/drawing/2014/main" id="{26DA6E4D-ABC9-F258-40F0-21CCB9EB75D7}"/>
+              </a:ext>
+            </a:extLst>
+          </p:cNvPr>
+          <p:cNvSpPr txBox="1"/>
+          <p:nvPr/>
+        </p:nvSpPr>
+        <p:spPr>
+          <a:xfrm>
+            <a:off x="8195666" y="7873909"/>
+            <a:ext cx="1003801" cy="523092"/>
+          </a:xfrm>
+          <a:prstGeom prst="rect">
+            <a:avLst/>
+          </a:prstGeom>
+          <a:noFill/>
+        </p:spPr>
+        <p:txBody>
+          <a:bodyPr wrap="none" rtlCol="0">
+            <a:spAutoFit/>
+          </a:bodyPr>
+          <a:lstStyle/>
+          <a:p>
+            <a:r>
+              <a:rPr lang="en-CA" sz="2799" b="1" dirty="0">
+                <a:latin typeface="Arial" panose="020B0604020202020204" pitchFamily="34" charset="0"/>
+                <a:cs typeface="Arial" panose="020B0604020202020204" pitchFamily="34" charset="0"/>
+              </a:rPr>
+              <a:t>2 </a:t>
+            </a:r>
+            <a:r>
+              <a:rPr lang="en-CA" sz="2799" b="1" dirty="0" err="1">
+                <a:latin typeface="Arial" panose="020B0604020202020204" pitchFamily="34" charset="0"/>
+                <a:cs typeface="Arial" panose="020B0604020202020204" pitchFamily="34" charset="0"/>
+              </a:rPr>
+              <a:t>ms</a:t>
+            </a:r>
+            <a:endParaRPr lang="en-CA" sz="2799" b="1" dirty="0">
+              <a:latin typeface="Arial" panose="020B0604020202020204" pitchFamily="34" charset="0"/>
+              <a:cs typeface="Arial" panose="020B0604020202020204" pitchFamily="34" charset="0"/>
+            </a:endParaRPr>
+          </a:p>
+        </p:txBody>
+      </p:sp>
+      <p:sp>
+        <p:nvSpPr>
+          <p:cNvPr id="70" name="Rectangle 69">
+            <a:extLst>
+              <a:ext uri="{FF2B5EF4-FFF2-40B4-BE49-F238E27FC236}">
+                <a16:creationId xmlns:a16="http://schemas.microsoft.com/office/drawing/2014/main" id="{C09195C4-26EB-F318-C8E8-CFC1070142DA}"/>
+              </a:ext>
+            </a:extLst>
+          </p:cNvPr>
+          <p:cNvSpPr/>
+          <p:nvPr/>
+        </p:nvSpPr>
+        <p:spPr>
+          <a:xfrm>
+            <a:off x="11811649" y="891992"/>
+            <a:ext cx="2827299" cy="8493194"/>
+          </a:xfrm>
+          <a:prstGeom prst="rect">
+            <a:avLst/>
+          </a:prstGeom>
+          <a:solidFill>
+            <a:schemeClr val="accent5">
+              <a:lumMod val="20000"/>
+              <a:lumOff val="80000"/>
+            </a:schemeClr>
+          </a:solidFill>
+          <a:ln w="57150">
+            <a:solidFill>
+              <a:schemeClr val="accent5">
+                <a:lumMod val="60000"/>
+                <a:lumOff val="40000"/>
+              </a:schemeClr>
+            </a:solidFill>
+            <a:prstDash val="dash"/>
+          </a:ln>
+        </p:spPr>
+        <p:style>
+          <a:lnRef idx="1">
+            <a:schemeClr val="accent5"/>
+          </a:lnRef>
+          <a:fillRef idx="2">
+            <a:schemeClr val="accent5"/>
+          </a:fillRef>
+          <a:effectRef idx="1">
+            <a:schemeClr val="accent5"/>
+          </a:effectRef>
+          <a:fontRef idx="minor">
+            <a:schemeClr val="dk1"/>
+          </a:fontRef>
+        </p:style>
+        <p:txBody>
+          <a:bodyPr rtlCol="0" anchor="ctr"/>
+          <a:lstStyle/>
+          <a:p>
+            <a:pPr algn="ctr"/>
+            <a:endParaRPr lang="en-CA" sz="1114" b="1"/>
+          </a:p>
+        </p:txBody>
+      </p:sp>
+      <p:sp>
+        <p:nvSpPr>
+          <p:cNvPr id="71" name="TextBox 70">
+            <a:extLst>
+              <a:ext uri="{FF2B5EF4-FFF2-40B4-BE49-F238E27FC236}">
+                <a16:creationId xmlns:a16="http://schemas.microsoft.com/office/drawing/2014/main" id="{75682066-0A9E-F2D0-6A1C-3C6C667BFFF0}"/>
+              </a:ext>
+            </a:extLst>
+          </p:cNvPr>
+          <p:cNvSpPr txBox="1"/>
+          <p:nvPr/>
+        </p:nvSpPr>
+        <p:spPr>
+          <a:xfrm>
+            <a:off x="12390855" y="1489627"/>
+            <a:ext cx="1823961" cy="523092"/>
+          </a:xfrm>
+          <a:prstGeom prst="rect">
+            <a:avLst/>
+          </a:prstGeom>
+          <a:noFill/>
+        </p:spPr>
+        <p:txBody>
+          <a:bodyPr wrap="none" rtlCol="0">
+            <a:spAutoFit/>
+          </a:bodyPr>
+          <a:lstStyle/>
+          <a:p>
+            <a:r>
+              <a:rPr lang="en-CA" sz="2799" b="1" dirty="0">
+                <a:latin typeface="Arial" panose="020B0604020202020204" pitchFamily="34" charset="0"/>
+                <a:cs typeface="Arial" panose="020B0604020202020204" pitchFamily="34" charset="0"/>
+              </a:rPr>
+              <a:t>Trial 1000</a:t>
+            </a:r>
+          </a:p>
+        </p:txBody>
+      </p:sp>
+      <p:sp>
+        <p:nvSpPr>
+          <p:cNvPr id="72" name="Rectangle 71">
+            <a:extLst>
+              <a:ext uri="{FF2B5EF4-FFF2-40B4-BE49-F238E27FC236}">
+                <a16:creationId xmlns:a16="http://schemas.microsoft.com/office/drawing/2014/main" id="{065882A8-67CF-4595-65E5-EB7F809013ED}"/>
+              </a:ext>
+            </a:extLst>
+          </p:cNvPr>
+          <p:cNvSpPr/>
+          <p:nvPr/>
+        </p:nvSpPr>
+        <p:spPr>
+          <a:xfrm>
+            <a:off x="12397795" y="2203345"/>
+            <a:ext cx="463163" cy="7181841"/>
+          </a:xfrm>
+          <a:prstGeom prst="rect">
+            <a:avLst/>
+          </a:prstGeom>
+          <a:solidFill>
+            <a:schemeClr val="accent5"/>
+          </a:solidFill>
+          <a:ln w="28575">
+            <a:solidFill>
+              <a:schemeClr val="tx1"/>
+            </a:solidFill>
+          </a:ln>
+        </p:spPr>
+        <p:style>
+          <a:lnRef idx="1">
+            <a:schemeClr val="accent5"/>
+          </a:lnRef>
+          <a:fillRef idx="2">
+            <a:schemeClr val="accent5"/>
+          </a:fillRef>
+          <a:effectRef idx="1">
+            <a:schemeClr val="accent5"/>
+          </a:effectRef>
+          <a:fontRef idx="minor">
+            <a:schemeClr val="dk1"/>
+          </a:fontRef>
+        </p:style>
+        <p:txBody>
+          <a:bodyPr rtlCol="0" anchor="ctr"/>
+          <a:lstStyle/>
+          <a:p>
+            <a:pPr algn="ctr"/>
+            <a:endParaRPr lang="en-CA" sz="1114"/>
+          </a:p>
+        </p:txBody>
+      </p:sp>
+      <p:cxnSp>
+        <p:nvCxnSpPr>
+          <p:cNvPr id="73" name="Straight Arrow Connector 72">
+            <a:extLst>
+              <a:ext uri="{FF2B5EF4-FFF2-40B4-BE49-F238E27FC236}">
+                <a16:creationId xmlns:a16="http://schemas.microsoft.com/office/drawing/2014/main" id="{B33A1DE7-C69C-6426-D8E7-2152648B8B7C}"/>
+              </a:ext>
+            </a:extLst>
+          </p:cNvPr>
+          <p:cNvCxnSpPr>
+            <a:cxnSpLocks/>
+          </p:cNvCxnSpPr>
+          <p:nvPr/>
+        </p:nvCxnSpPr>
+        <p:spPr>
+          <a:xfrm>
+            <a:off x="12397795" y="8194908"/>
+            <a:ext cx="463663" cy="0"/>
+          </a:xfrm>
+          <a:prstGeom prst="straightConnector1">
+            <a:avLst/>
+          </a:prstGeom>
+          <a:ln w="38100">
+            <a:solidFill>
+              <a:schemeClr val="tx1"/>
+            </a:solidFill>
+            <a:headEnd type="triangle"/>
+            <a:tailEnd type="triangle"/>
+          </a:ln>
+        </p:spPr>
+        <p:style>
+          <a:lnRef idx="1">
+            <a:schemeClr val="accent1"/>
+          </a:lnRef>
+          <a:fillRef idx="0">
+            <a:schemeClr val="accent1"/>
+          </a:fillRef>
+          <a:effectRef idx="0">
+            <a:schemeClr val="accent1"/>
+          </a:effectRef>
+          <a:fontRef idx="minor">
+            <a:schemeClr val="tx1"/>
+          </a:fontRef>
+        </p:style>
+      </p:cxnSp>
+      <p:sp>
+        <p:nvSpPr>
+          <p:cNvPr id="74" name="TextBox 73">
+            <a:extLst>
+              <a:ext uri="{FF2B5EF4-FFF2-40B4-BE49-F238E27FC236}">
+                <a16:creationId xmlns:a16="http://schemas.microsoft.com/office/drawing/2014/main" id="{9A08AECA-D8FC-6B20-4E9E-E2EB7542EB7F}"/>
+              </a:ext>
+            </a:extLst>
+          </p:cNvPr>
+          <p:cNvSpPr txBox="1"/>
+          <p:nvPr/>
+        </p:nvSpPr>
+        <p:spPr>
+          <a:xfrm>
+            <a:off x="12857641" y="7873173"/>
+            <a:ext cx="1003801" cy="523092"/>
+          </a:xfrm>
+          <a:prstGeom prst="rect">
+            <a:avLst/>
+          </a:prstGeom>
+          <a:noFill/>
+        </p:spPr>
+        <p:txBody>
+          <a:bodyPr wrap="none" rtlCol="0">
+            <a:spAutoFit/>
+          </a:bodyPr>
+          <a:lstStyle/>
+          <a:p>
+            <a:r>
+              <a:rPr lang="en-CA" sz="2799" b="1" dirty="0">
+                <a:latin typeface="Arial" panose="020B0604020202020204" pitchFamily="34" charset="0"/>
+                <a:cs typeface="Arial" panose="020B0604020202020204" pitchFamily="34" charset="0"/>
+              </a:rPr>
+              <a:t>2 </a:t>
+            </a:r>
+            <a:r>
+              <a:rPr lang="en-CA" sz="2799" b="1" dirty="0" err="1">
+                <a:latin typeface="Arial" panose="020B0604020202020204" pitchFamily="34" charset="0"/>
+                <a:cs typeface="Arial" panose="020B0604020202020204" pitchFamily="34" charset="0"/>
+              </a:rPr>
+              <a:t>ms</a:t>
+            </a:r>
+            <a:endParaRPr lang="en-CA" sz="2799" b="1" dirty="0">
+              <a:latin typeface="Arial" panose="020B0604020202020204" pitchFamily="34" charset="0"/>
+              <a:cs typeface="Arial" panose="020B0604020202020204" pitchFamily="34" charset="0"/>
+            </a:endParaRPr>
+          </a:p>
+        </p:txBody>
+      </p:sp>
+      <p:cxnSp>
+        <p:nvCxnSpPr>
+          <p:cNvPr id="76" name="Straight Arrow Connector 75">
+            <a:extLst>
+              <a:ext uri="{FF2B5EF4-FFF2-40B4-BE49-F238E27FC236}">
+                <a16:creationId xmlns:a16="http://schemas.microsoft.com/office/drawing/2014/main" id="{6469EEA7-9CEB-E1AA-26D0-CFB2A21D9B3B}"/>
+              </a:ext>
+            </a:extLst>
+          </p:cNvPr>
+          <p:cNvCxnSpPr>
+            <a:cxnSpLocks/>
+          </p:cNvCxnSpPr>
+          <p:nvPr/>
+        </p:nvCxnSpPr>
+        <p:spPr>
+          <a:xfrm flipV="1">
+            <a:off x="1566893" y="9384449"/>
+            <a:ext cx="14097916" cy="35460"/>
+          </a:xfrm>
+          <a:prstGeom prst="straightConnector1">
+            <a:avLst/>
+          </a:prstGeom>
+          <a:ln w="76200">
+            <a:solidFill>
+              <a:schemeClr val="tx1"/>
+            </a:solidFill>
+            <a:tailEnd type="triangle"/>
+          </a:ln>
+        </p:spPr>
+        <p:style>
+          <a:lnRef idx="1">
+            <a:schemeClr val="accent1"/>
+          </a:lnRef>
+          <a:fillRef idx="0">
+            <a:schemeClr val="accent1"/>
+          </a:fillRef>
+          <a:effectRef idx="0">
+            <a:schemeClr val="accent1"/>
+          </a:effectRef>
+          <a:fontRef idx="minor">
+            <a:schemeClr val="tx1"/>
+          </a:fontRef>
+        </p:style>
+      </p:cxnSp>
+      <p:cxnSp>
+        <p:nvCxnSpPr>
+          <p:cNvPr id="77" name="Straight Arrow Connector 76">
+            <a:extLst>
+              <a:ext uri="{FF2B5EF4-FFF2-40B4-BE49-F238E27FC236}">
+                <a16:creationId xmlns:a16="http://schemas.microsoft.com/office/drawing/2014/main" id="{5D26436E-2435-7127-4A3B-A2816621D9F3}"/>
+              </a:ext>
+            </a:extLst>
+          </p:cNvPr>
+          <p:cNvCxnSpPr>
+            <a:cxnSpLocks/>
+          </p:cNvCxnSpPr>
+          <p:nvPr/>
+        </p:nvCxnSpPr>
+        <p:spPr>
+          <a:xfrm>
+            <a:off x="1527917" y="6335048"/>
+            <a:ext cx="586149" cy="0"/>
+          </a:xfrm>
+          <a:prstGeom prst="straightConnector1">
+            <a:avLst/>
+          </a:prstGeom>
+          <a:ln w="38100">
+            <a:solidFill>
+              <a:schemeClr val="tx1"/>
+            </a:solidFill>
+            <a:headEnd type="triangle"/>
+            <a:tailEnd type="triangle"/>
+          </a:ln>
+        </p:spPr>
+        <p:style>
+          <a:lnRef idx="1">
+            <a:schemeClr val="accent1"/>
+          </a:lnRef>
+          <a:fillRef idx="0">
+            <a:schemeClr val="accent1"/>
+          </a:fillRef>
+          <a:effectRef idx="0">
+            <a:schemeClr val="accent1"/>
+          </a:effectRef>
+          <a:fontRef idx="minor">
+            <a:schemeClr val="tx1"/>
+          </a:fontRef>
+        </p:style>
+      </p:cxnSp>
+      <p:cxnSp>
+        <p:nvCxnSpPr>
+          <p:cNvPr id="79" name="Straight Arrow Connector 78">
+            <a:extLst>
+              <a:ext uri="{FF2B5EF4-FFF2-40B4-BE49-F238E27FC236}">
+                <a16:creationId xmlns:a16="http://schemas.microsoft.com/office/drawing/2014/main" id="{38412300-F680-18AE-2672-EADE1FBB4A25}"/>
+              </a:ext>
+            </a:extLst>
+          </p:cNvPr>
+          <p:cNvCxnSpPr>
+            <a:cxnSpLocks/>
+          </p:cNvCxnSpPr>
+          <p:nvPr/>
+        </p:nvCxnSpPr>
+        <p:spPr>
+          <a:xfrm>
+            <a:off x="4355219" y="6335048"/>
+            <a:ext cx="586149" cy="0"/>
+          </a:xfrm>
+          <a:prstGeom prst="straightConnector1">
+            <a:avLst/>
+          </a:prstGeom>
+          <a:ln w="38100">
+            <a:solidFill>
+              <a:schemeClr val="tx1"/>
+            </a:solidFill>
+            <a:headEnd type="triangle"/>
+            <a:tailEnd type="triangle"/>
+          </a:ln>
+        </p:spPr>
+        <p:style>
+          <a:lnRef idx="1">
+            <a:schemeClr val="accent1"/>
+          </a:lnRef>
+          <a:fillRef idx="0">
+            <a:schemeClr val="accent1"/>
+          </a:fillRef>
+          <a:effectRef idx="0">
+            <a:schemeClr val="accent1"/>
+          </a:effectRef>
+          <a:fontRef idx="minor">
+            <a:schemeClr val="tx1"/>
+          </a:fontRef>
+        </p:style>
+      </p:cxnSp>
+      <p:cxnSp>
+        <p:nvCxnSpPr>
+          <p:cNvPr id="80" name="Straight Arrow Connector 79">
+            <a:extLst>
+              <a:ext uri="{FF2B5EF4-FFF2-40B4-BE49-F238E27FC236}">
+                <a16:creationId xmlns:a16="http://schemas.microsoft.com/office/drawing/2014/main" id="{A0DAB5D8-C785-1715-C80D-5B52E0AF45C5}"/>
+              </a:ext>
+            </a:extLst>
+          </p:cNvPr>
+          <p:cNvCxnSpPr>
+            <a:cxnSpLocks/>
+          </p:cNvCxnSpPr>
+          <p:nvPr/>
+        </p:nvCxnSpPr>
+        <p:spPr>
+          <a:xfrm>
+            <a:off x="7149674" y="6335048"/>
+            <a:ext cx="586149" cy="0"/>
+          </a:xfrm>
+          <a:prstGeom prst="straightConnector1">
+            <a:avLst/>
+          </a:prstGeom>
+          <a:ln w="38100">
+            <a:solidFill>
+              <a:schemeClr val="tx1"/>
+            </a:solidFill>
+            <a:headEnd type="triangle"/>
+            <a:tailEnd type="triangle"/>
+          </a:ln>
+        </p:spPr>
+        <p:style>
+          <a:lnRef idx="1">
+            <a:schemeClr val="accent1"/>
+          </a:lnRef>
+          <a:fillRef idx="0">
+            <a:schemeClr val="accent1"/>
+          </a:fillRef>
+          <a:effectRef idx="0">
+            <a:schemeClr val="accent1"/>
+          </a:effectRef>
+          <a:fontRef idx="minor">
+            <a:schemeClr val="tx1"/>
+          </a:fontRef>
+        </p:style>
+      </p:cxnSp>
+      <p:cxnSp>
+        <p:nvCxnSpPr>
+          <p:cNvPr id="81" name="Straight Arrow Connector 80">
+            <a:extLst>
+              <a:ext uri="{FF2B5EF4-FFF2-40B4-BE49-F238E27FC236}">
+                <a16:creationId xmlns:a16="http://schemas.microsoft.com/office/drawing/2014/main" id="{AFABC3D7-592D-E279-CC7C-59BA8259F5E3}"/>
+              </a:ext>
+            </a:extLst>
+          </p:cNvPr>
+          <p:cNvCxnSpPr>
+            <a:cxnSpLocks/>
+          </p:cNvCxnSpPr>
+          <p:nvPr/>
+        </p:nvCxnSpPr>
+        <p:spPr>
+          <a:xfrm>
+            <a:off x="11811649" y="6335048"/>
+            <a:ext cx="586149" cy="0"/>
+          </a:xfrm>
+          <a:prstGeom prst="straightConnector1">
+            <a:avLst/>
+          </a:prstGeom>
+          <a:ln w="38100">
+            <a:solidFill>
+              <a:schemeClr val="tx1"/>
+            </a:solidFill>
+            <a:headEnd type="triangle"/>
+            <a:tailEnd type="triangle"/>
+          </a:ln>
+        </p:spPr>
+        <p:style>
+          <a:lnRef idx="1">
+            <a:schemeClr val="accent1"/>
+          </a:lnRef>
+          <a:fillRef idx="0">
+            <a:schemeClr val="accent1"/>
+          </a:fillRef>
+          <a:effectRef idx="0">
+            <a:schemeClr val="accent1"/>
+          </a:effectRef>
+          <a:fontRef idx="minor">
+            <a:schemeClr val="tx1"/>
+          </a:fontRef>
+        </p:style>
+      </p:cxnSp>
+      <p:cxnSp>
+        <p:nvCxnSpPr>
+          <p:cNvPr id="85" name="Straight Arrow Connector 84">
+            <a:extLst>
+              <a:ext uri="{FF2B5EF4-FFF2-40B4-BE49-F238E27FC236}">
+                <a16:creationId xmlns:a16="http://schemas.microsoft.com/office/drawing/2014/main" id="{23665BA6-CC79-7664-3A88-EF5335EEE4C2}"/>
+              </a:ext>
+            </a:extLst>
+          </p:cNvPr>
+          <p:cNvCxnSpPr>
+            <a:cxnSpLocks/>
+          </p:cNvCxnSpPr>
+          <p:nvPr/>
+        </p:nvCxnSpPr>
+        <p:spPr>
+          <a:xfrm>
+            <a:off x="7151604" y="10078390"/>
+            <a:ext cx="2827299" cy="0"/>
+          </a:xfrm>
+          <a:prstGeom prst="straightConnector1">
+            <a:avLst/>
+          </a:prstGeom>
+          <a:ln w="76200">
+            <a:solidFill>
+              <a:schemeClr val="tx1"/>
+            </a:solidFill>
+            <a:headEnd type="triangle"/>
+            <a:tailEnd type="triangle"/>
+          </a:ln>
+        </p:spPr>
+        <p:style>
+          <a:lnRef idx="1">
+            <a:schemeClr val="accent1"/>
+          </a:lnRef>
+          <a:fillRef idx="0">
+            <a:schemeClr val="accent1"/>
+          </a:fillRef>
+          <a:effectRef idx="0">
+            <a:schemeClr val="accent1"/>
+          </a:effectRef>
+          <a:fontRef idx="minor">
+            <a:schemeClr val="tx1"/>
+          </a:fontRef>
+        </p:style>
+      </p:cxnSp>
+      <p:sp>
+        <p:nvSpPr>
+          <p:cNvPr id="86" name="TextBox 85">
+            <a:extLst>
+              <a:ext uri="{FF2B5EF4-FFF2-40B4-BE49-F238E27FC236}">
+                <a16:creationId xmlns:a16="http://schemas.microsoft.com/office/drawing/2014/main" id="{EB468F92-5101-7B46-B303-C3AC38872336}"/>
+              </a:ext>
+            </a:extLst>
+          </p:cNvPr>
+          <p:cNvSpPr txBox="1"/>
+          <p:nvPr/>
+        </p:nvSpPr>
+        <p:spPr>
+          <a:xfrm>
+            <a:off x="7939517" y="10197780"/>
+            <a:ext cx="1404552" cy="523092"/>
+          </a:xfrm>
+          <a:prstGeom prst="rect">
+            <a:avLst/>
+          </a:prstGeom>
+          <a:noFill/>
+        </p:spPr>
+        <p:txBody>
+          <a:bodyPr wrap="square" rtlCol="0">
+            <a:spAutoFit/>
+          </a:bodyPr>
+          <a:lstStyle/>
+          <a:p>
+            <a:r>
+              <a:rPr lang="en-CA" sz="2799" b="1" dirty="0">
+                <a:latin typeface="Arial" panose="020B0604020202020204" pitchFamily="34" charset="0"/>
+                <a:cs typeface="Arial" panose="020B0604020202020204" pitchFamily="34" charset="0"/>
+              </a:rPr>
+              <a:t>100 </a:t>
+            </a:r>
+            <a:r>
+              <a:rPr lang="en-CA" sz="2799" b="1" dirty="0" err="1">
+                <a:latin typeface="Arial" panose="020B0604020202020204" pitchFamily="34" charset="0"/>
+                <a:cs typeface="Arial" panose="020B0604020202020204" pitchFamily="34" charset="0"/>
+              </a:rPr>
+              <a:t>ms</a:t>
+            </a:r>
+            <a:endParaRPr lang="en-CA" sz="2799" b="1" dirty="0">
+              <a:latin typeface="Arial" panose="020B0604020202020204" pitchFamily="34" charset="0"/>
+              <a:cs typeface="Arial" panose="020B0604020202020204" pitchFamily="34" charset="0"/>
+            </a:endParaRPr>
+          </a:p>
+        </p:txBody>
+      </p:sp>
+      <p:cxnSp>
+        <p:nvCxnSpPr>
+          <p:cNvPr id="91" name="Straight Arrow Connector 90">
+            <a:extLst>
+              <a:ext uri="{FF2B5EF4-FFF2-40B4-BE49-F238E27FC236}">
+                <a16:creationId xmlns:a16="http://schemas.microsoft.com/office/drawing/2014/main" id="{5CD77017-2A9B-3E5C-02EE-807D7E8187B0}"/>
+              </a:ext>
+            </a:extLst>
+          </p:cNvPr>
+          <p:cNvCxnSpPr>
+            <a:cxnSpLocks/>
+          </p:cNvCxnSpPr>
+          <p:nvPr/>
+        </p:nvCxnSpPr>
+        <p:spPr>
+          <a:xfrm>
+            <a:off x="4324305" y="10078390"/>
+            <a:ext cx="2827299" cy="0"/>
+          </a:xfrm>
+          <a:prstGeom prst="straightConnector1">
+            <a:avLst/>
+          </a:prstGeom>
+          <a:ln w="76200">
+            <a:solidFill>
+              <a:schemeClr val="tx1"/>
+            </a:solidFill>
+            <a:headEnd type="triangle"/>
+            <a:tailEnd type="triangle"/>
+          </a:ln>
+        </p:spPr>
+        <p:style>
+          <a:lnRef idx="1">
+            <a:schemeClr val="accent1"/>
+          </a:lnRef>
+          <a:fillRef idx="0">
+            <a:schemeClr val="accent1"/>
+          </a:fillRef>
+          <a:effectRef idx="0">
+            <a:schemeClr val="accent1"/>
+          </a:effectRef>
+          <a:fontRef idx="minor">
+            <a:schemeClr val="tx1"/>
+          </a:fontRef>
+        </p:style>
+      </p:cxnSp>
+      <p:sp>
+        <p:nvSpPr>
+          <p:cNvPr id="92" name="TextBox 91">
+            <a:extLst>
+              <a:ext uri="{FF2B5EF4-FFF2-40B4-BE49-F238E27FC236}">
+                <a16:creationId xmlns:a16="http://schemas.microsoft.com/office/drawing/2014/main" id="{08ADF9FD-1B0A-81ED-4AF7-8DCCB766F63C}"/>
+              </a:ext>
+            </a:extLst>
+          </p:cNvPr>
+          <p:cNvSpPr txBox="1"/>
+          <p:nvPr/>
+        </p:nvSpPr>
+        <p:spPr>
+          <a:xfrm>
+            <a:off x="5112218" y="10197780"/>
+            <a:ext cx="1404552" cy="523092"/>
+          </a:xfrm>
+          <a:prstGeom prst="rect">
+            <a:avLst/>
+          </a:prstGeom>
+          <a:noFill/>
+        </p:spPr>
+        <p:txBody>
+          <a:bodyPr wrap="square" rtlCol="0">
+            <a:spAutoFit/>
+          </a:bodyPr>
+          <a:lstStyle/>
+          <a:p>
+            <a:r>
+              <a:rPr lang="en-CA" sz="2799" b="1" dirty="0">
+                <a:latin typeface="Arial" panose="020B0604020202020204" pitchFamily="34" charset="0"/>
+                <a:cs typeface="Arial" panose="020B0604020202020204" pitchFamily="34" charset="0"/>
+              </a:rPr>
+              <a:t>100 </a:t>
+            </a:r>
+            <a:r>
+              <a:rPr lang="en-CA" sz="2799" b="1" dirty="0" err="1">
+                <a:latin typeface="Arial" panose="020B0604020202020204" pitchFamily="34" charset="0"/>
+                <a:cs typeface="Arial" panose="020B0604020202020204" pitchFamily="34" charset="0"/>
+              </a:rPr>
+              <a:t>ms</a:t>
+            </a:r>
+            <a:endParaRPr lang="en-CA" sz="2799" b="1" dirty="0">
+              <a:latin typeface="Arial" panose="020B0604020202020204" pitchFamily="34" charset="0"/>
+              <a:cs typeface="Arial" panose="020B0604020202020204" pitchFamily="34" charset="0"/>
+            </a:endParaRPr>
+          </a:p>
+        </p:txBody>
+      </p:sp>
+      <p:cxnSp>
+        <p:nvCxnSpPr>
+          <p:cNvPr id="93" name="Straight Arrow Connector 92">
+            <a:extLst>
+              <a:ext uri="{FF2B5EF4-FFF2-40B4-BE49-F238E27FC236}">
+                <a16:creationId xmlns:a16="http://schemas.microsoft.com/office/drawing/2014/main" id="{BAB88D7A-30DB-B954-120A-ADB048EA80A7}"/>
+              </a:ext>
+            </a:extLst>
+          </p:cNvPr>
+          <p:cNvCxnSpPr>
+            <a:cxnSpLocks/>
+          </p:cNvCxnSpPr>
+          <p:nvPr/>
+        </p:nvCxnSpPr>
+        <p:spPr>
+          <a:xfrm>
+            <a:off x="1497006" y="10078390"/>
+            <a:ext cx="2827299" cy="0"/>
+          </a:xfrm>
+          <a:prstGeom prst="straightConnector1">
+            <a:avLst/>
+          </a:prstGeom>
+          <a:ln w="76200">
+            <a:solidFill>
+              <a:schemeClr val="tx1"/>
+            </a:solidFill>
+            <a:headEnd type="triangle"/>
+            <a:tailEnd type="triangle"/>
+          </a:ln>
+        </p:spPr>
+        <p:style>
+          <a:lnRef idx="1">
+            <a:schemeClr val="accent1"/>
+          </a:lnRef>
+          <a:fillRef idx="0">
+            <a:schemeClr val="accent1"/>
+          </a:fillRef>
+          <a:effectRef idx="0">
+            <a:schemeClr val="accent1"/>
+          </a:effectRef>
+          <a:fontRef idx="minor">
+            <a:schemeClr val="tx1"/>
+          </a:fontRef>
+        </p:style>
+      </p:cxnSp>
+      <p:sp>
+        <p:nvSpPr>
+          <p:cNvPr id="94" name="TextBox 93">
+            <a:extLst>
+              <a:ext uri="{FF2B5EF4-FFF2-40B4-BE49-F238E27FC236}">
+                <a16:creationId xmlns:a16="http://schemas.microsoft.com/office/drawing/2014/main" id="{1A4EC55A-57FE-B73E-4AF7-59D7A5704689}"/>
+              </a:ext>
+            </a:extLst>
+          </p:cNvPr>
+          <p:cNvSpPr txBox="1"/>
+          <p:nvPr/>
+        </p:nvSpPr>
+        <p:spPr>
+          <a:xfrm>
+            <a:off x="2284919" y="10197780"/>
+            <a:ext cx="1404552" cy="523092"/>
+          </a:xfrm>
+          <a:prstGeom prst="rect">
+            <a:avLst/>
+          </a:prstGeom>
+          <a:noFill/>
+        </p:spPr>
+        <p:txBody>
+          <a:bodyPr wrap="square" rtlCol="0">
+            <a:spAutoFit/>
+          </a:bodyPr>
+          <a:lstStyle/>
+          <a:p>
+            <a:r>
+              <a:rPr lang="en-CA" sz="2799" b="1" dirty="0">
+                <a:latin typeface="Arial" panose="020B0604020202020204" pitchFamily="34" charset="0"/>
+                <a:cs typeface="Arial" panose="020B0604020202020204" pitchFamily="34" charset="0"/>
+              </a:rPr>
+              <a:t>100 </a:t>
+            </a:r>
+            <a:r>
+              <a:rPr lang="en-CA" sz="2799" b="1" dirty="0" err="1">
+                <a:latin typeface="Arial" panose="020B0604020202020204" pitchFamily="34" charset="0"/>
+                <a:cs typeface="Arial" panose="020B0604020202020204" pitchFamily="34" charset="0"/>
+              </a:rPr>
+              <a:t>ms</a:t>
+            </a:r>
+            <a:endParaRPr lang="en-CA" sz="2799" b="1" dirty="0">
+              <a:latin typeface="Arial" panose="020B0604020202020204" pitchFamily="34" charset="0"/>
+              <a:cs typeface="Arial" panose="020B0604020202020204" pitchFamily="34" charset="0"/>
+            </a:endParaRPr>
+          </a:p>
+        </p:txBody>
+      </p:sp>
+      <p:cxnSp>
+        <p:nvCxnSpPr>
+          <p:cNvPr id="97" name="Straight Arrow Connector 96">
+            <a:extLst>
+              <a:ext uri="{FF2B5EF4-FFF2-40B4-BE49-F238E27FC236}">
+                <a16:creationId xmlns:a16="http://schemas.microsoft.com/office/drawing/2014/main" id="{A3902F36-73CC-F19D-A747-A371B51E727F}"/>
+              </a:ext>
+            </a:extLst>
+          </p:cNvPr>
+          <p:cNvCxnSpPr>
+            <a:cxnSpLocks/>
+          </p:cNvCxnSpPr>
+          <p:nvPr/>
+        </p:nvCxnSpPr>
+        <p:spPr>
+          <a:xfrm>
+            <a:off x="11811649" y="10083860"/>
+            <a:ext cx="2827299" cy="0"/>
+          </a:xfrm>
+          <a:prstGeom prst="straightConnector1">
+            <a:avLst/>
+          </a:prstGeom>
+          <a:ln w="76200">
+            <a:solidFill>
+              <a:schemeClr val="tx1"/>
+            </a:solidFill>
+            <a:headEnd type="triangle"/>
+            <a:tailEnd type="triangle"/>
+          </a:ln>
+        </p:spPr>
+        <p:style>
+          <a:lnRef idx="1">
+            <a:schemeClr val="accent1"/>
+          </a:lnRef>
+          <a:fillRef idx="0">
+            <a:schemeClr val="accent1"/>
+          </a:fillRef>
+          <a:effectRef idx="0">
+            <a:schemeClr val="accent1"/>
+          </a:effectRef>
+          <a:fontRef idx="minor">
+            <a:schemeClr val="tx1"/>
+          </a:fontRef>
+        </p:style>
+      </p:cxnSp>
+      <p:sp>
+        <p:nvSpPr>
+          <p:cNvPr id="98" name="TextBox 97">
+            <a:extLst>
+              <a:ext uri="{FF2B5EF4-FFF2-40B4-BE49-F238E27FC236}">
+                <a16:creationId xmlns:a16="http://schemas.microsoft.com/office/drawing/2014/main" id="{189831C2-A982-D124-72DD-FC73F7332BE8}"/>
+              </a:ext>
+            </a:extLst>
+          </p:cNvPr>
+          <p:cNvSpPr txBox="1"/>
+          <p:nvPr/>
+        </p:nvSpPr>
+        <p:spPr>
+          <a:xfrm>
+            <a:off x="12599562" y="10203250"/>
+            <a:ext cx="1404552" cy="523092"/>
+          </a:xfrm>
+          <a:prstGeom prst="rect">
+            <a:avLst/>
+          </a:prstGeom>
+          <a:noFill/>
+        </p:spPr>
+        <p:txBody>
+          <a:bodyPr wrap="square" rtlCol="0">
+            <a:spAutoFit/>
+          </a:bodyPr>
+          <a:lstStyle/>
+          <a:p>
+            <a:r>
+              <a:rPr lang="en-CA" sz="2799" b="1" dirty="0">
+                <a:latin typeface="Arial" panose="020B0604020202020204" pitchFamily="34" charset="0"/>
+                <a:cs typeface="Arial" panose="020B0604020202020204" pitchFamily="34" charset="0"/>
+              </a:rPr>
+              <a:t>100 </a:t>
+            </a:r>
+            <a:r>
+              <a:rPr lang="en-CA" sz="2799" b="1" dirty="0" err="1">
+                <a:latin typeface="Arial" panose="020B0604020202020204" pitchFamily="34" charset="0"/>
+                <a:cs typeface="Arial" panose="020B0604020202020204" pitchFamily="34" charset="0"/>
+              </a:rPr>
+              <a:t>ms</a:t>
+            </a:r>
+            <a:endParaRPr lang="en-CA" sz="2799" b="1" dirty="0">
+              <a:latin typeface="Arial" panose="020B0604020202020204" pitchFamily="34" charset="0"/>
+              <a:cs typeface="Arial" panose="020B0604020202020204" pitchFamily="34" charset="0"/>
+            </a:endParaRPr>
+          </a:p>
+        </p:txBody>
+      </p:sp>
+      <mc:AlternateContent xmlns:mc="http://schemas.openxmlformats.org/markup-compatibility/2006">
+        <mc:Choice xmlns:a14="http://schemas.microsoft.com/office/drawing/2010/main" Requires="a14">
+          <p:sp>
+            <p:nvSpPr>
+              <p:cNvPr id="99" name="TextBox 98">
+                <a:extLst>
+                  <a:ext uri="{FF2B5EF4-FFF2-40B4-BE49-F238E27FC236}">
+                    <a16:creationId xmlns:a16="http://schemas.microsoft.com/office/drawing/2014/main" id="{9F969F5A-2EC6-15EE-7326-FDF0F7BFE0EA}"/>
+                  </a:ext>
+                </a:extLst>
+              </p:cNvPr>
+              <p:cNvSpPr txBox="1"/>
+              <p:nvPr/>
+            </p:nvSpPr>
+            <p:spPr>
+              <a:xfrm>
+                <a:off x="1611801" y="5784772"/>
+                <a:ext cx="517065" cy="430887"/>
+              </a:xfrm>
+              <a:prstGeom prst="rect">
+                <a:avLst/>
+              </a:prstGeom>
+              <a:noFill/>
+            </p:spPr>
+            <p:txBody>
+              <a:bodyPr wrap="none" lIns="0" tIns="0" rIns="0" bIns="0" rtlCol="0">
+                <a:spAutoFit/>
+              </a:bodyPr>
+              <a:lstStyle/>
+              <a:p>
+                <a14:m>
+                  <m:oMathPara xmlns:m="http://schemas.openxmlformats.org/officeDocument/2006/math">
+                    <m:oMathParaPr>
+                      <m:jc m:val="centerGroup"/>
+                    </m:oMathParaPr>
+                    <m:oMath xmlns:m="http://schemas.openxmlformats.org/officeDocument/2006/math">
+                      <m:sSub>
+                        <m:sSubPr>
+                          <m:ctrlPr>
+                            <a:rPr lang="en-CA" sz="2800" i="1" smtClean="0">
+                              <a:latin typeface="Cambria Math" panose="02040503050406030204" pitchFamily="18" charset="0"/>
+                            </a:rPr>
+                          </m:ctrlPr>
+                        </m:sSubPr>
+                        <m:e>
+                          <m:r>
+                            <a:rPr lang="en-CA" sz="2800" i="1" smtClean="0">
+                              <a:latin typeface="Cambria Math" panose="02040503050406030204" pitchFamily="18" charset="0"/>
+                              <a:ea typeface="Cambria Math" panose="02040503050406030204" pitchFamily="18" charset="0"/>
+                            </a:rPr>
+                            <m:t>𝛿</m:t>
+                          </m:r>
+                          <m:r>
+                            <a:rPr lang="en-US" sz="2800" b="0" i="1" smtClean="0">
+                              <a:latin typeface="Cambria Math" panose="02040503050406030204" pitchFamily="18" charset="0"/>
+                              <a:ea typeface="Cambria Math" panose="02040503050406030204" pitchFamily="18" charset="0"/>
+                            </a:rPr>
+                            <m:t>𝑡</m:t>
+                          </m:r>
+                        </m:e>
+                        <m:sub>
+                          <m:r>
+                            <a:rPr lang="en-US" sz="2800" b="0" i="1" smtClean="0">
+                              <a:latin typeface="Cambria Math" panose="02040503050406030204" pitchFamily="18" charset="0"/>
+                            </a:rPr>
+                            <m:t>𝑖</m:t>
+                          </m:r>
+                        </m:sub>
+                      </m:sSub>
+                    </m:oMath>
+                  </m:oMathPara>
+                </a14:m>
+                <a:endParaRPr lang="en-CA" sz="2800" dirty="0"/>
+              </a:p>
+            </p:txBody>
+          </p:sp>
+        </mc:Choice>
+        <mc:Fallback>
+          <p:sp>
+            <p:nvSpPr>
+              <p:cNvPr id="99" name="TextBox 98">
+                <a:extLst>
+                  <a:ext uri="{FF2B5EF4-FFF2-40B4-BE49-F238E27FC236}">
+                    <a16:creationId xmlns:a16="http://schemas.microsoft.com/office/drawing/2014/main" id="{9F969F5A-2EC6-15EE-7326-FDF0F7BFE0EA}"/>
+                  </a:ext>
+                </a:extLst>
+              </p:cNvPr>
+              <p:cNvSpPr txBox="1">
+                <a:spLocks noRot="1" noChangeAspect="1" noMove="1" noResize="1" noEditPoints="1" noAdjustHandles="1" noChangeArrowheads="1" noChangeShapeType="1" noTextEdit="1"/>
+              </p:cNvSpPr>
+              <p:nvPr/>
+            </p:nvSpPr>
+            <p:spPr>
+              <a:xfrm>
+                <a:off x="1611801" y="5784772"/>
+                <a:ext cx="517065" cy="430887"/>
+              </a:xfrm>
+              <a:prstGeom prst="rect">
+                <a:avLst/>
+              </a:prstGeom>
+              <a:blipFill>
+                <a:blip r:embed="rId3"/>
+                <a:stretch>
+                  <a:fillRect/>
+                </a:stretch>
+              </a:blipFill>
+            </p:spPr>
+            <p:txBody>
+              <a:bodyPr/>
+              <a:lstStyle/>
+              <a:p>
+                <a:r>
+                  <a:rPr lang="en-CA">
+                    <a:noFill/>
+                  </a:rPr>
+                  <a:t> </a:t>
+                </a:r>
+              </a:p>
+            </p:txBody>
+          </p:sp>
+        </mc:Fallback>
+      </mc:AlternateContent>
+      <mc:AlternateContent xmlns:mc="http://schemas.openxmlformats.org/markup-compatibility/2006">
+        <mc:Choice xmlns:a14="http://schemas.microsoft.com/office/drawing/2010/main" Requires="a14">
+          <p:sp>
+            <p:nvSpPr>
+              <p:cNvPr id="100" name="TextBox 99">
+                <a:extLst>
+                  <a:ext uri="{FF2B5EF4-FFF2-40B4-BE49-F238E27FC236}">
+                    <a16:creationId xmlns:a16="http://schemas.microsoft.com/office/drawing/2014/main" id="{F6340317-0C13-4D6F-00B2-84523468F451}"/>
+                  </a:ext>
+                </a:extLst>
+              </p:cNvPr>
+              <p:cNvSpPr txBox="1"/>
+              <p:nvPr/>
+            </p:nvSpPr>
+            <p:spPr>
+              <a:xfrm>
+                <a:off x="4392886" y="5806076"/>
+                <a:ext cx="517065" cy="430887"/>
+              </a:xfrm>
+              <a:prstGeom prst="rect">
+                <a:avLst/>
+              </a:prstGeom>
+              <a:noFill/>
+            </p:spPr>
+            <p:txBody>
+              <a:bodyPr wrap="none" lIns="0" tIns="0" rIns="0" bIns="0" rtlCol="0">
+                <a:spAutoFit/>
+              </a:bodyPr>
+              <a:lstStyle/>
+              <a:p>
+                <a14:m>
+                  <m:oMathPara xmlns:m="http://schemas.openxmlformats.org/officeDocument/2006/math">
+                    <m:oMathParaPr>
+                      <m:jc m:val="centerGroup"/>
+                    </m:oMathParaPr>
+                    <m:oMath xmlns:m="http://schemas.openxmlformats.org/officeDocument/2006/math">
+                      <m:sSub>
+                        <m:sSubPr>
+                          <m:ctrlPr>
+                            <a:rPr lang="en-CA" sz="2800" i="1" smtClean="0">
+                              <a:latin typeface="Cambria Math" panose="02040503050406030204" pitchFamily="18" charset="0"/>
+                            </a:rPr>
+                          </m:ctrlPr>
+                        </m:sSubPr>
+                        <m:e>
+                          <m:r>
+                            <a:rPr lang="en-CA" sz="2800" i="1" smtClean="0">
+                              <a:latin typeface="Cambria Math" panose="02040503050406030204" pitchFamily="18" charset="0"/>
+                              <a:ea typeface="Cambria Math" panose="02040503050406030204" pitchFamily="18" charset="0"/>
+                            </a:rPr>
+                            <m:t>𝛿</m:t>
+                          </m:r>
+                          <m:r>
+                            <a:rPr lang="en-US" sz="2800" b="0" i="1" smtClean="0">
+                              <a:latin typeface="Cambria Math" panose="02040503050406030204" pitchFamily="18" charset="0"/>
+                              <a:ea typeface="Cambria Math" panose="02040503050406030204" pitchFamily="18" charset="0"/>
+                            </a:rPr>
+                            <m:t>𝑡</m:t>
+                          </m:r>
+                        </m:e>
+                        <m:sub>
+                          <m:r>
+                            <a:rPr lang="en-US" sz="2800" b="0" i="1" smtClean="0">
+                              <a:latin typeface="Cambria Math" panose="02040503050406030204" pitchFamily="18" charset="0"/>
+                            </a:rPr>
+                            <m:t>𝑖</m:t>
+                          </m:r>
+                        </m:sub>
+                      </m:sSub>
+                    </m:oMath>
+                  </m:oMathPara>
+                </a14:m>
+                <a:endParaRPr lang="en-CA" sz="2800" dirty="0"/>
+              </a:p>
+            </p:txBody>
+          </p:sp>
+        </mc:Choice>
+        <mc:Fallback>
+          <p:sp>
+            <p:nvSpPr>
+              <p:cNvPr id="100" name="TextBox 99">
+                <a:extLst>
+                  <a:ext uri="{FF2B5EF4-FFF2-40B4-BE49-F238E27FC236}">
+                    <a16:creationId xmlns:a16="http://schemas.microsoft.com/office/drawing/2014/main" id="{F6340317-0C13-4D6F-00B2-84523468F451}"/>
+                  </a:ext>
+                </a:extLst>
+              </p:cNvPr>
+              <p:cNvSpPr txBox="1">
+                <a:spLocks noRot="1" noChangeAspect="1" noMove="1" noResize="1" noEditPoints="1" noAdjustHandles="1" noChangeArrowheads="1" noChangeShapeType="1" noTextEdit="1"/>
+              </p:cNvSpPr>
+              <p:nvPr/>
+            </p:nvSpPr>
+            <p:spPr>
+              <a:xfrm>
+                <a:off x="4392886" y="5806076"/>
+                <a:ext cx="517065" cy="430887"/>
+              </a:xfrm>
+              <a:prstGeom prst="rect">
+                <a:avLst/>
+              </a:prstGeom>
+              <a:blipFill>
+                <a:blip r:embed="rId4"/>
+                <a:stretch>
+                  <a:fillRect/>
+                </a:stretch>
+              </a:blipFill>
+            </p:spPr>
+            <p:txBody>
+              <a:bodyPr/>
+              <a:lstStyle/>
+              <a:p>
+                <a:r>
+                  <a:rPr lang="en-CA">
+                    <a:noFill/>
+                  </a:rPr>
+                  <a:t> </a:t>
+                </a:r>
+              </a:p>
+            </p:txBody>
+          </p:sp>
+        </mc:Fallback>
+      </mc:AlternateContent>
+      <mc:AlternateContent xmlns:mc="http://schemas.openxmlformats.org/markup-compatibility/2006">
+        <mc:Choice xmlns:a14="http://schemas.microsoft.com/office/drawing/2010/main" Requires="a14">
+          <p:sp>
+            <p:nvSpPr>
+              <p:cNvPr id="101" name="TextBox 100">
+                <a:extLst>
+                  <a:ext uri="{FF2B5EF4-FFF2-40B4-BE49-F238E27FC236}">
+                    <a16:creationId xmlns:a16="http://schemas.microsoft.com/office/drawing/2014/main" id="{E8D8FE60-ECEE-FA25-35F0-6AF303184CE7}"/>
+                  </a:ext>
+                </a:extLst>
+              </p:cNvPr>
+              <p:cNvSpPr txBox="1"/>
+              <p:nvPr/>
+            </p:nvSpPr>
+            <p:spPr>
+              <a:xfrm>
+                <a:off x="7197902" y="5818623"/>
+                <a:ext cx="517065" cy="430887"/>
+              </a:xfrm>
+              <a:prstGeom prst="rect">
+                <a:avLst/>
+              </a:prstGeom>
+              <a:noFill/>
+            </p:spPr>
+            <p:txBody>
+              <a:bodyPr wrap="none" lIns="0" tIns="0" rIns="0" bIns="0" rtlCol="0">
+                <a:spAutoFit/>
+              </a:bodyPr>
+              <a:lstStyle/>
+              <a:p>
+                <a14:m>
+                  <m:oMathPara xmlns:m="http://schemas.openxmlformats.org/officeDocument/2006/math">
+                    <m:oMathParaPr>
+                      <m:jc m:val="centerGroup"/>
+                    </m:oMathParaPr>
+                    <m:oMath xmlns:m="http://schemas.openxmlformats.org/officeDocument/2006/math">
+                      <m:sSub>
+                        <m:sSubPr>
+                          <m:ctrlPr>
+                            <a:rPr lang="en-CA" sz="2800" i="1" smtClean="0">
+                              <a:latin typeface="Cambria Math" panose="02040503050406030204" pitchFamily="18" charset="0"/>
+                            </a:rPr>
+                          </m:ctrlPr>
+                        </m:sSubPr>
+                        <m:e>
+                          <m:r>
+                            <a:rPr lang="en-CA" sz="2800" i="1" smtClean="0">
+                              <a:latin typeface="Cambria Math" panose="02040503050406030204" pitchFamily="18" charset="0"/>
+                              <a:ea typeface="Cambria Math" panose="02040503050406030204" pitchFamily="18" charset="0"/>
+                            </a:rPr>
+                            <m:t>𝛿</m:t>
+                          </m:r>
+                          <m:r>
+                            <a:rPr lang="en-US" sz="2800" b="0" i="1" smtClean="0">
+                              <a:latin typeface="Cambria Math" panose="02040503050406030204" pitchFamily="18" charset="0"/>
+                              <a:ea typeface="Cambria Math" panose="02040503050406030204" pitchFamily="18" charset="0"/>
+                            </a:rPr>
+                            <m:t>𝑡</m:t>
+                          </m:r>
+                        </m:e>
+                        <m:sub>
+                          <m:r>
+                            <a:rPr lang="en-US" sz="2800" b="0" i="1" smtClean="0">
+                              <a:latin typeface="Cambria Math" panose="02040503050406030204" pitchFamily="18" charset="0"/>
+                            </a:rPr>
+                            <m:t>𝑖</m:t>
+                          </m:r>
+                        </m:sub>
+                      </m:sSub>
+                    </m:oMath>
+                  </m:oMathPara>
+                </a14:m>
+                <a:endParaRPr lang="en-CA" sz="2800" dirty="0"/>
+              </a:p>
+            </p:txBody>
+          </p:sp>
+        </mc:Choice>
+        <mc:Fallback>
+          <p:sp>
+            <p:nvSpPr>
+              <p:cNvPr id="101" name="TextBox 100">
+                <a:extLst>
+                  <a:ext uri="{FF2B5EF4-FFF2-40B4-BE49-F238E27FC236}">
+                    <a16:creationId xmlns:a16="http://schemas.microsoft.com/office/drawing/2014/main" id="{E8D8FE60-ECEE-FA25-35F0-6AF303184CE7}"/>
+                  </a:ext>
+                </a:extLst>
+              </p:cNvPr>
+              <p:cNvSpPr txBox="1">
+                <a:spLocks noRot="1" noChangeAspect="1" noMove="1" noResize="1" noEditPoints="1" noAdjustHandles="1" noChangeArrowheads="1" noChangeShapeType="1" noTextEdit="1"/>
+              </p:cNvSpPr>
+              <p:nvPr/>
+            </p:nvSpPr>
+            <p:spPr>
+              <a:xfrm>
+                <a:off x="7197902" y="5818623"/>
+                <a:ext cx="517065" cy="430887"/>
+              </a:xfrm>
+              <a:prstGeom prst="rect">
+                <a:avLst/>
+              </a:prstGeom>
+              <a:blipFill>
+                <a:blip r:embed="rId5"/>
+                <a:stretch>
+                  <a:fillRect/>
+                </a:stretch>
+              </a:blipFill>
+            </p:spPr>
+            <p:txBody>
+              <a:bodyPr/>
+              <a:lstStyle/>
+              <a:p>
+                <a:r>
+                  <a:rPr lang="en-CA">
+                    <a:noFill/>
+                  </a:rPr>
+                  <a:t> </a:t>
+                </a:r>
+              </a:p>
+            </p:txBody>
+          </p:sp>
+        </mc:Fallback>
+      </mc:AlternateContent>
+      <mc:AlternateContent xmlns:mc="http://schemas.openxmlformats.org/markup-compatibility/2006">
+        <mc:Choice xmlns:a14="http://schemas.microsoft.com/office/drawing/2010/main" Requires="a14">
+          <p:sp>
+            <p:nvSpPr>
+              <p:cNvPr id="102" name="TextBox 101">
+                <a:extLst>
+                  <a:ext uri="{FF2B5EF4-FFF2-40B4-BE49-F238E27FC236}">
+                    <a16:creationId xmlns:a16="http://schemas.microsoft.com/office/drawing/2014/main" id="{DB5B94AA-3B55-F33C-07E5-FEACAA195822}"/>
+                  </a:ext>
+                </a:extLst>
+              </p:cNvPr>
+              <p:cNvSpPr txBox="1"/>
+              <p:nvPr/>
+            </p:nvSpPr>
+            <p:spPr>
+              <a:xfrm>
+                <a:off x="11846190" y="5806075"/>
+                <a:ext cx="517065" cy="430887"/>
+              </a:xfrm>
+              <a:prstGeom prst="rect">
+                <a:avLst/>
+              </a:prstGeom>
+              <a:noFill/>
+            </p:spPr>
+            <p:txBody>
+              <a:bodyPr wrap="none" lIns="0" tIns="0" rIns="0" bIns="0" rtlCol="0">
+                <a:spAutoFit/>
+              </a:bodyPr>
+              <a:lstStyle/>
+              <a:p>
+                <a14:m>
+                  <m:oMathPara xmlns:m="http://schemas.openxmlformats.org/officeDocument/2006/math">
+                    <m:oMathParaPr>
+                      <m:jc m:val="centerGroup"/>
+                    </m:oMathParaPr>
+                    <m:oMath xmlns:m="http://schemas.openxmlformats.org/officeDocument/2006/math">
+                      <m:sSub>
+                        <m:sSubPr>
+                          <m:ctrlPr>
+                            <a:rPr lang="en-CA" sz="2800" i="1" smtClean="0">
+                              <a:latin typeface="Cambria Math" panose="02040503050406030204" pitchFamily="18" charset="0"/>
+                            </a:rPr>
+                          </m:ctrlPr>
+                        </m:sSubPr>
+                        <m:e>
+                          <m:r>
+                            <a:rPr lang="en-CA" sz="2800" i="1" smtClean="0">
+                              <a:latin typeface="Cambria Math" panose="02040503050406030204" pitchFamily="18" charset="0"/>
+                              <a:ea typeface="Cambria Math" panose="02040503050406030204" pitchFamily="18" charset="0"/>
+                            </a:rPr>
+                            <m:t>𝛿</m:t>
+                          </m:r>
+                          <m:r>
+                            <a:rPr lang="en-US" sz="2800" b="0" i="1" smtClean="0">
+                              <a:latin typeface="Cambria Math" panose="02040503050406030204" pitchFamily="18" charset="0"/>
+                              <a:ea typeface="Cambria Math" panose="02040503050406030204" pitchFamily="18" charset="0"/>
+                            </a:rPr>
+                            <m:t>𝑡</m:t>
+                          </m:r>
+                        </m:e>
+                        <m:sub>
+                          <m:r>
+                            <a:rPr lang="en-US" sz="2800" b="0" i="1" smtClean="0">
+                              <a:latin typeface="Cambria Math" panose="02040503050406030204" pitchFamily="18" charset="0"/>
+                            </a:rPr>
+                            <m:t>𝑖</m:t>
+                          </m:r>
+                        </m:sub>
+                      </m:sSub>
+                    </m:oMath>
+                  </m:oMathPara>
+                </a14:m>
+                <a:endParaRPr lang="en-CA" sz="2800" dirty="0"/>
+              </a:p>
+            </p:txBody>
+          </p:sp>
+        </mc:Choice>
+        <mc:Fallback>
+          <p:sp>
+            <p:nvSpPr>
+              <p:cNvPr id="102" name="TextBox 101">
+                <a:extLst>
+                  <a:ext uri="{FF2B5EF4-FFF2-40B4-BE49-F238E27FC236}">
+                    <a16:creationId xmlns:a16="http://schemas.microsoft.com/office/drawing/2014/main" id="{DB5B94AA-3B55-F33C-07E5-FEACAA195822}"/>
+                  </a:ext>
+                </a:extLst>
+              </p:cNvPr>
+              <p:cNvSpPr txBox="1">
+                <a:spLocks noRot="1" noChangeAspect="1" noMove="1" noResize="1" noEditPoints="1" noAdjustHandles="1" noChangeArrowheads="1" noChangeShapeType="1" noTextEdit="1"/>
+              </p:cNvSpPr>
+              <p:nvPr/>
+            </p:nvSpPr>
+            <p:spPr>
+              <a:xfrm>
+                <a:off x="11846190" y="5806075"/>
+                <a:ext cx="517065" cy="430887"/>
+              </a:xfrm>
+              <a:prstGeom prst="rect">
+                <a:avLst/>
+              </a:prstGeom>
+              <a:blipFill>
+                <a:blip r:embed="rId6"/>
+                <a:stretch>
+                  <a:fillRect/>
+                </a:stretch>
+              </a:blipFill>
+            </p:spPr>
+            <p:txBody>
+              <a:bodyPr/>
+              <a:lstStyle/>
+              <a:p>
+                <a:r>
+                  <a:rPr lang="en-CA">
+                    <a:noFill/>
+                  </a:rPr>
+                  <a:t> </a:t>
+                </a:r>
+              </a:p>
+            </p:txBody>
+          </p:sp>
+        </mc:Fallback>
+      </mc:AlternateContent>
+    </p:spTree>
+    <p:extLst>
+      <p:ext uri="{BB962C8B-B14F-4D97-AF65-F5344CB8AC3E}">
+        <p14:creationId xmlns:p14="http://schemas.microsoft.com/office/powerpoint/2010/main" val="3223175659"/>
       </p:ext>
     </p:extLst>
   </p:cSld>
